--- a/output/wordlabs-order-3day.pptx
+++ b/output/wordlabs-order-3day.pptx
@@ -4240,7 +4240,7 @@
                 <a:ea typeface="Calibri" pitchFamily="34" charset="-122"/>
                 <a:cs typeface="Calibri" pitchFamily="34" charset="-120"/>
               </a:rPr>
-              <a:t>"arrange, sequence, command"</a:t>
+              <a:t>"arrangement, sequence, command"</a:t>
             </a:r>
             <a:endParaRPr lang="en-US" sz="2200" dirty="0"/>
           </a:p>
@@ -5288,7 +5288,7 @@
                 <a:ea typeface="Calibri" pitchFamily="34" charset="-122"/>
                 <a:cs typeface="Calibri" pitchFamily="34" charset="-120"/>
               </a:rPr>
-              <a:t>Word Labs  •  wordlabs.app  •  Root: 'order' = arrange, sequence, command</a:t>
+              <a:t>Word Labs  •  wordlabs.app  •  Root: 'order' = arrangement, sequence, command</a:t>
             </a:r>
             <a:endParaRPr lang="en-US" sz="800" dirty="0"/>
           </a:p>
@@ -5622,7 +5622,7 @@
                 <a:ea typeface="Trebuchet MS" pitchFamily="34" charset="-122"/>
                 <a:cs typeface="Trebuchet MS" pitchFamily="34" charset="-120"/>
               </a:rPr>
-              <a:t>0</a:t>
+              <a:t>1</a:t>
             </a:r>
             <a:pPr algn="ctr" indent="0" marL="0">
               <a:buNone/>
@@ -5928,7 +5928,7 @@
                 <a:ea typeface="Calibri" pitchFamily="34" charset="-122"/>
                 <a:cs typeface="Calibri" pitchFamily="34" charset="-120"/>
               </a:rPr>
-              <a:t>Word Labs  •  wordlabs.app  •  Root: 'order' = arrange, sequence, command</a:t>
+              <a:t>Word Labs  •  wordlabs.app  •  Root: 'order' = arrangement, sequence, command</a:t>
             </a:r>
             <a:endParaRPr lang="en-US" sz="800" dirty="0"/>
           </a:p>
@@ -6040,7 +6040,7 @@
                 <a:ea typeface="Calibri" pitchFamily="34" charset="-122"/>
                 <a:cs typeface="Calibri" pitchFamily="34" charset="-120"/>
               </a:rPr>
-              <a:t>The </a:t>
+              <a:t>The students were asked to work in an </a:t>
             </a:r>
             <a:pPr algn="l" indent="0" marL="0">
               <a:buNone/>
@@ -6071,7 +6071,7 @@
                 <a:ea typeface="Calibri" pitchFamily="34" charset="-122"/>
                 <a:cs typeface="Calibri" pitchFamily="34" charset="-120"/>
               </a:rPr>
-              <a:t> nurse helped us </a:t>
+              <a:t> manner, so they began </a:t>
             </a:r>
             <a:pPr algn="l" indent="0" marL="0">
               <a:buNone/>
@@ -6088,7 +6088,7 @@
                 <a:ea typeface="Calibri" pitchFamily="34" charset="-122"/>
                 <a:cs typeface="Calibri" pitchFamily="34" charset="-120"/>
               </a:rPr>
-              <a:t>reorder</a:t>
+              <a:t>reordering</a:t>
             </a:r>
             <a:pPr algn="l" indent="0" marL="0">
               <a:buNone/>
@@ -6102,7 +6102,7 @@
                 <a:ea typeface="Calibri" pitchFamily="34" charset="-122"/>
                 <a:cs typeface="Calibri" pitchFamily="34" charset="-120"/>
               </a:rPr>
-              <a:t> the files in the hospital.</a:t>
+              <a:t> their notes from the lesson.</a:t>
             </a:r>
             <a:endParaRPr lang="en-US" sz="1800" dirty="0"/>
           </a:p>
@@ -6385,7 +6385,7 @@
                 <a:ea typeface="Trebuchet MS" pitchFamily="34" charset="-122"/>
                 <a:cs typeface="Trebuchet MS" pitchFamily="34" charset="-120"/>
               </a:rPr>
-              <a:t>reorder</a:t>
+              <a:t>reordering</a:t>
             </a:r>
             <a:endParaRPr lang="en-US" sz="1400" dirty="0"/>
           </a:p>
@@ -6716,7 +6716,7 @@
                 <a:ea typeface="Calibri" pitchFamily="34" charset="-122"/>
                 <a:cs typeface="Calibri" pitchFamily="34" charset="-120"/>
               </a:rPr>
-              <a:t>Word Labs  •  wordlabs.app  •  Root: 'order' = arrange, sequence, command</a:t>
+              <a:t>Word Labs  •  wordlabs.app  •  Root: 'order' = arrangement, sequence, command</a:t>
             </a:r>
             <a:endParaRPr lang="en-US" sz="800" dirty="0"/>
           </a:p>
@@ -7543,7 +7543,7 @@
                 <a:ea typeface="Calibri" pitchFamily="34" charset="-122"/>
                 <a:cs typeface="Calibri" pitchFamily="34" charset="-120"/>
               </a:rPr>
-              <a:t>Word Labs  •  wordlabs.app  •  Root: 'order' = arrange, sequence, command</a:t>
+              <a:t>Word Labs  •  wordlabs.app  •  Root: 'order' = arrangement, sequence, command</a:t>
             </a:r>
             <a:endParaRPr lang="en-US" sz="800" dirty="0"/>
           </a:p>
@@ -7860,7 +7860,7 @@
                 <a:ea typeface="Calibri" pitchFamily="34" charset="-122"/>
                 <a:cs typeface="Calibri" pitchFamily="34" charset="-120"/>
               </a:rPr>
-              <a:t>arrange, sequence</a:t>
+              <a:t>arrangement, sequence</a:t>
             </a:r>
             <a:endParaRPr lang="en-US" sz="850" dirty="0"/>
           </a:p>
@@ -7972,7 +7972,7 @@
                 <a:ea typeface="Calibri" pitchFamily="34" charset="-122"/>
                 <a:cs typeface="Calibri" pitchFamily="34" charset="-120"/>
               </a:rPr>
-              <a:t>in the manner of</a:t>
+              <a:t>in a manner of</a:t>
             </a:r>
             <a:endParaRPr lang="en-US" sz="850" dirty="0"/>
           </a:p>
@@ -8528,7 +8528,7 @@
                 <a:ea typeface="Calibri" pitchFamily="34" charset="-122"/>
                 <a:cs typeface="Calibri" pitchFamily="34" charset="-120"/>
               </a:rPr>
-              <a:t>Word Labs  •  wordlabs.app  •  Root: 'order' = arrange, sequence, command</a:t>
+              <a:t>Word Labs  •  wordlabs.app  •  Root: 'order' = arrangement, sequence, command</a:t>
             </a:r>
             <a:endParaRPr lang="en-US" sz="800" dirty="0"/>
           </a:p>
@@ -8845,7 +8845,7 @@
                 <a:ea typeface="Calibri" pitchFamily="34" charset="-122"/>
                 <a:cs typeface="Calibri" pitchFamily="34" charset="-120"/>
               </a:rPr>
-              <a:t>arrange, sequence</a:t>
+              <a:t>arrangement, sequence</a:t>
             </a:r>
             <a:endParaRPr lang="en-US" sz="850" dirty="0"/>
           </a:p>
@@ -8957,7 +8957,7 @@
                 <a:ea typeface="Calibri" pitchFamily="34" charset="-122"/>
                 <a:cs typeface="Calibri" pitchFamily="34" charset="-120"/>
               </a:rPr>
-              <a:t>in the manner of</a:t>
+              <a:t>in a manner of</a:t>
             </a:r>
             <a:endParaRPr lang="en-US" sz="850" dirty="0"/>
           </a:p>
@@ -9750,7 +9750,7 @@
                 <a:ea typeface="Calibri" pitchFamily="34" charset="-122"/>
                 <a:cs typeface="Calibri" pitchFamily="34" charset="-120"/>
               </a:rPr>
-              <a:t>Word Labs  •  wordlabs.app  •  Root: 'order' = arrange, sequence, command</a:t>
+              <a:t>Word Labs  •  wordlabs.app  •  Root: 'order' = arrangement, sequence, command</a:t>
             </a:r>
             <a:endParaRPr lang="en-US" sz="800" dirty="0"/>
           </a:p>
@@ -10067,7 +10067,7 @@
                 <a:ea typeface="Calibri" pitchFamily="34" charset="-122"/>
                 <a:cs typeface="Calibri" pitchFamily="34" charset="-120"/>
               </a:rPr>
-              <a:t>arrange, sequence</a:t>
+              <a:t>arrangement, sequence</a:t>
             </a:r>
             <a:endParaRPr lang="en-US" sz="850" dirty="0"/>
           </a:p>
@@ -10179,7 +10179,7 @@
                 <a:ea typeface="Calibri" pitchFamily="34" charset="-122"/>
                 <a:cs typeface="Calibri" pitchFamily="34" charset="-120"/>
               </a:rPr>
-              <a:t>in the manner of</a:t>
+              <a:t>in a manner of</a:t>
             </a:r>
             <a:endParaRPr lang="en-US" sz="850" dirty="0"/>
           </a:p>
@@ -11263,7 +11263,7 @@
                 <a:ea typeface="Calibri" pitchFamily="34" charset="-122"/>
                 <a:cs typeface="Calibri" pitchFamily="34" charset="-120"/>
               </a:rPr>
-              <a:t>Word Labs  •  wordlabs.app  •  Root: 'order' = arrange, sequence, command</a:t>
+              <a:t>Word Labs  •  wordlabs.app  •  Root: 'order' = arrangement, sequence, command</a:t>
             </a:r>
             <a:endParaRPr lang="en-US" sz="800" dirty="0"/>
           </a:p>
@@ -11402,7 +11402,7 @@
                 <a:ea typeface="Trebuchet MS" pitchFamily="34" charset="-122"/>
                 <a:cs typeface="Trebuchet MS" pitchFamily="34" charset="-120"/>
               </a:rPr>
-              <a:t>reorder</a:t>
+              <a:t>reordering</a:t>
             </a:r>
             <a:endParaRPr lang="en-US" sz="2800" dirty="0"/>
           </a:p>
@@ -12090,7 +12090,7 @@
                 <a:ea typeface="Calibri" pitchFamily="34" charset="-122"/>
                 <a:cs typeface="Calibri" pitchFamily="34" charset="-120"/>
               </a:rPr>
-              <a:t>Word Labs  •  wordlabs.app  •  Root: 'order' = arrange, sequence, command</a:t>
+              <a:t>Word Labs  •  wordlabs.app  •  Root: 'order' = arrangement, sequence, command</a:t>
             </a:r>
             <a:endParaRPr lang="en-US" sz="800" dirty="0"/>
           </a:p>
@@ -12229,7 +12229,7 @@
                 <a:ea typeface="Trebuchet MS" pitchFamily="34" charset="-122"/>
                 <a:cs typeface="Trebuchet MS" pitchFamily="34" charset="-120"/>
               </a:rPr>
-              <a:t>reorder</a:t>
+              <a:t>reordering</a:t>
             </a:r>
             <a:endParaRPr lang="en-US" sz="2800" dirty="0"/>
           </a:p>
@@ -12309,7 +12309,7 @@
         </p:nvSpPr>
         <p:spPr>
           <a:xfrm>
-            <a:off x="2938272" y="2258568"/>
+            <a:off x="2221992" y="2258568"/>
             <a:ext cx="1828800" cy="292608"/>
           </a:xfrm>
           <a:prstGeom prst="rect">
@@ -12343,7 +12343,7 @@
         </p:nvSpPr>
         <p:spPr>
           <a:xfrm>
-            <a:off x="2938272" y="2258568"/>
+            <a:off x="2221992" y="2258568"/>
             <a:ext cx="1828800" cy="292608"/>
           </a:xfrm>
           <a:prstGeom prst="rect">
@@ -12382,7 +12382,7 @@
         </p:nvSpPr>
         <p:spPr>
           <a:xfrm>
-            <a:off x="2938272" y="2569464"/>
+            <a:off x="2221992" y="2569464"/>
             <a:ext cx="1828800" cy="201168"/>
           </a:xfrm>
           <a:prstGeom prst="rect">
@@ -12421,7 +12421,7 @@
         </p:nvSpPr>
         <p:spPr>
           <a:xfrm>
-            <a:off x="5803392" y="2258568"/>
+            <a:off x="4370832" y="2258568"/>
             <a:ext cx="1828800" cy="292608"/>
           </a:xfrm>
           <a:prstGeom prst="rect">
@@ -12455,7 +12455,7 @@
         </p:nvSpPr>
         <p:spPr>
           <a:xfrm>
-            <a:off x="5803392" y="2258568"/>
+            <a:off x="4370832" y="2258568"/>
             <a:ext cx="1828800" cy="292608"/>
           </a:xfrm>
           <a:prstGeom prst="rect">
@@ -12494,7 +12494,7 @@
         </p:nvSpPr>
         <p:spPr>
           <a:xfrm>
-            <a:off x="5803392" y="2569464"/>
+            <a:off x="4370832" y="2569464"/>
             <a:ext cx="1828800" cy="201168"/>
           </a:xfrm>
           <a:prstGeom prst="rect">
@@ -12519,7 +12519,7 @@
                 <a:ea typeface="Calibri" pitchFamily="34" charset="-122"/>
                 <a:cs typeface="Calibri" pitchFamily="34" charset="-120"/>
               </a:rPr>
-              <a:t>arrange, sequence</a:t>
+              <a:t>arrangement, sequence</a:t>
             </a:r>
             <a:endParaRPr lang="en-US" sz="850" dirty="0"/>
           </a:p>
@@ -12528,6 +12528,118 @@
       <p:sp>
         <p:nvSpPr>
           <p:cNvPr id="22" name="Shape 20"/>
+          <p:cNvSpPr/>
+          <p:nvPr/>
+        </p:nvSpPr>
+        <p:spPr>
+          <a:xfrm>
+            <a:off x="6519672" y="2258568"/>
+            <a:ext cx="1828800" cy="292608"/>
+          </a:xfrm>
+          <a:prstGeom prst="rect">
+            <a:avLst>
+              <a:gd name="adj" fmla="val 25000"/>
+            </a:avLst>
+          </a:prstGeom>
+          <a:solidFill>
+            <a:srgbClr val="FCE7F3"/>
+          </a:solidFill>
+          <a:ln w="19050">
+            <a:solidFill>
+              <a:srgbClr val="DB2777"/>
+            </a:solidFill>
+            <a:prstDash val="solid"/>
+          </a:ln>
+          <a:effectLst>
+            <a:outerShdw sx="100000" sy="100000" kx="0" ky="0" algn="bl" rotWithShape="0" blurRad="101600" dist="38100" dir="8100000">
+              <a:srgbClr val="000000">
+                <a:alpha val="12000"/>
+              </a:srgbClr>
+            </a:outerShdw>
+          </a:effectLst>
+        </p:spPr>
+      </p:sp>
+      <p:sp>
+        <p:nvSpPr>
+          <p:cNvPr id="23" name="Text 21"/>
+          <p:cNvSpPr/>
+          <p:nvPr/>
+        </p:nvSpPr>
+        <p:spPr>
+          <a:xfrm>
+            <a:off x="6519672" y="2258568"/>
+            <a:ext cx="1828800" cy="292608"/>
+          </a:xfrm>
+          <a:prstGeom prst="rect">
+            <a:avLst/>
+          </a:prstGeom>
+          <a:noFill/>
+          <a:ln/>
+        </p:spPr>
+        <p:txBody>
+          <a:bodyPr wrap="square" lIns="0" tIns="0" rIns="0" bIns="0" rtlCol="0" anchor="ctr"/>
+          <a:lstStyle/>
+          <a:p>
+            <a:pPr algn="ctr" indent="0" marL="0">
+              <a:buNone/>
+            </a:pPr>
+            <a:r>
+              <a:rPr lang="en-US" sz="1300" b="1" dirty="0">
+                <a:solidFill>
+                  <a:srgbClr val="9D174D"/>
+                </a:solidFill>
+                <a:latin typeface="Trebuchet MS" pitchFamily="34" charset="0"/>
+                <a:ea typeface="Trebuchet MS" pitchFamily="34" charset="-122"/>
+                <a:cs typeface="Trebuchet MS" pitchFamily="34" charset="-120"/>
+              </a:rPr>
+              <a:t>ing</a:t>
+            </a:r>
+            <a:endParaRPr lang="en-US" sz="1300" dirty="0"/>
+          </a:p>
+        </p:txBody>
+      </p:sp>
+      <p:sp>
+        <p:nvSpPr>
+          <p:cNvPr id="24" name="Text 22"/>
+          <p:cNvSpPr/>
+          <p:nvPr/>
+        </p:nvSpPr>
+        <p:spPr>
+          <a:xfrm>
+            <a:off x="6519672" y="2569464"/>
+            <a:ext cx="1828800" cy="201168"/>
+          </a:xfrm>
+          <a:prstGeom prst="rect">
+            <a:avLst/>
+          </a:prstGeom>
+          <a:noFill/>
+          <a:ln/>
+        </p:spPr>
+        <p:txBody>
+          <a:bodyPr wrap="square" lIns="0" tIns="0" rIns="0" bIns="0" rtlCol="0" anchor="t"/>
+          <a:lstStyle/>
+          <a:p>
+            <a:pPr algn="ctr" indent="0" marL="0">
+              <a:buNone/>
+            </a:pPr>
+            <a:r>
+              <a:rPr lang="en-US" sz="850" dirty="0">
+                <a:solidFill>
+                  <a:srgbClr val="475569"/>
+                </a:solidFill>
+                <a:latin typeface="Calibri" pitchFamily="34" charset="0"/>
+                <a:ea typeface="Calibri" pitchFamily="34" charset="-122"/>
+                <a:cs typeface="Calibri" pitchFamily="34" charset="-120"/>
+              </a:rPr>
+              <a:t>ongoing action</a:t>
+            </a:r>
+            <a:endParaRPr lang="en-US" sz="850" dirty="0"/>
+          </a:p>
+        </p:txBody>
+      </p:sp>
+      <p:sp>
+        <p:nvSpPr>
+          <p:cNvPr id="25" name="Shape 23"/>
           <p:cNvSpPr/>
           <p:nvPr/>
         </p:nvSpPr>
@@ -12554,7 +12666,7 @@
       </p:sp>
       <p:sp>
         <p:nvSpPr>
-          <p:cNvPr id="23" name="Text 21"/>
+          <p:cNvPr id="26" name="Text 24"/>
           <p:cNvSpPr/>
           <p:nvPr/>
         </p:nvSpPr>
@@ -12593,7 +12705,7 @@
       </p:sp>
       <p:sp>
         <p:nvSpPr>
-          <p:cNvPr id="24" name="Shape 22"/>
+          <p:cNvPr id="27" name="Shape 25"/>
           <p:cNvSpPr/>
           <p:nvPr/>
         </p:nvSpPr>
@@ -12620,7 +12732,7 @@
       </p:sp>
       <p:sp>
         <p:nvSpPr>
-          <p:cNvPr id="25" name="Text 23"/>
+          <p:cNvPr id="28" name="Text 26"/>
           <p:cNvSpPr/>
           <p:nvPr/>
         </p:nvSpPr>
@@ -12659,7 +12771,7 @@
       </p:sp>
       <p:sp>
         <p:nvSpPr>
-          <p:cNvPr id="26" name="Shape 24"/>
+          <p:cNvPr id="29" name="Shape 27"/>
           <p:cNvSpPr/>
           <p:nvPr/>
         </p:nvSpPr>
@@ -12686,7 +12798,7 @@
       </p:sp>
       <p:sp>
         <p:nvSpPr>
-          <p:cNvPr id="27" name="Text 25"/>
+          <p:cNvPr id="30" name="Text 28"/>
           <p:cNvSpPr/>
           <p:nvPr/>
         </p:nvSpPr>
@@ -12725,7 +12837,7 @@
       </p:sp>
       <p:sp>
         <p:nvSpPr>
-          <p:cNvPr id="28" name="Shape 26"/>
+          <p:cNvPr id="31" name="Shape 29"/>
           <p:cNvSpPr/>
           <p:nvPr/>
         </p:nvSpPr>
@@ -12752,7 +12864,7 @@
       </p:sp>
       <p:sp>
         <p:nvSpPr>
-          <p:cNvPr id="29" name="Text 27"/>
+          <p:cNvPr id="32" name="Text 30"/>
           <p:cNvSpPr/>
           <p:nvPr/>
         </p:nvSpPr>
@@ -13075,7 +13187,7 @@
                 <a:ea typeface="Calibri" pitchFamily="34" charset="-122"/>
                 <a:cs typeface="Calibri" pitchFamily="34" charset="-120"/>
               </a:rPr>
-              <a:t>Word Labs  •  wordlabs.app  •  Root: 'order' = arrange, sequence, command</a:t>
+              <a:t>Word Labs  •  wordlabs.app  •  Root: 'order' = arrangement, sequence, command</a:t>
             </a:r>
             <a:endParaRPr lang="en-US" sz="800" dirty="0"/>
           </a:p>
@@ -13214,7 +13326,7 @@
                 <a:ea typeface="Trebuchet MS" pitchFamily="34" charset="-122"/>
                 <a:cs typeface="Trebuchet MS" pitchFamily="34" charset="-120"/>
               </a:rPr>
-              <a:t>reorder</a:t>
+              <a:t>reordering</a:t>
             </a:r>
             <a:endParaRPr lang="en-US" sz="2800" dirty="0"/>
           </a:p>
@@ -13294,7 +13406,7 @@
         </p:nvSpPr>
         <p:spPr>
           <a:xfrm>
-            <a:off x="2938272" y="2258568"/>
+            <a:off x="2221992" y="2258568"/>
             <a:ext cx="1828800" cy="292608"/>
           </a:xfrm>
           <a:prstGeom prst="rect">
@@ -13328,7 +13440,7 @@
         </p:nvSpPr>
         <p:spPr>
           <a:xfrm>
-            <a:off x="2938272" y="2258568"/>
+            <a:off x="2221992" y="2258568"/>
             <a:ext cx="1828800" cy="292608"/>
           </a:xfrm>
           <a:prstGeom prst="rect">
@@ -13367,7 +13479,7 @@
         </p:nvSpPr>
         <p:spPr>
           <a:xfrm>
-            <a:off x="2938272" y="2569464"/>
+            <a:off x="2221992" y="2569464"/>
             <a:ext cx="1828800" cy="201168"/>
           </a:xfrm>
           <a:prstGeom prst="rect">
@@ -13406,7 +13518,7 @@
         </p:nvSpPr>
         <p:spPr>
           <a:xfrm>
-            <a:off x="5803392" y="2258568"/>
+            <a:off x="4370832" y="2258568"/>
             <a:ext cx="1828800" cy="292608"/>
           </a:xfrm>
           <a:prstGeom prst="rect">
@@ -13440,7 +13552,7 @@
         </p:nvSpPr>
         <p:spPr>
           <a:xfrm>
-            <a:off x="5803392" y="2258568"/>
+            <a:off x="4370832" y="2258568"/>
             <a:ext cx="1828800" cy="292608"/>
           </a:xfrm>
           <a:prstGeom prst="rect">
@@ -13479,7 +13591,7 @@
         </p:nvSpPr>
         <p:spPr>
           <a:xfrm>
-            <a:off x="5803392" y="2569464"/>
+            <a:off x="4370832" y="2569464"/>
             <a:ext cx="1828800" cy="201168"/>
           </a:xfrm>
           <a:prstGeom prst="rect">
@@ -13504,7 +13616,7 @@
                 <a:ea typeface="Calibri" pitchFamily="34" charset="-122"/>
                 <a:cs typeface="Calibri" pitchFamily="34" charset="-120"/>
               </a:rPr>
-              <a:t>arrange, sequence</a:t>
+              <a:t>arrangement, sequence</a:t>
             </a:r>
             <a:endParaRPr lang="en-US" sz="850" dirty="0"/>
           </a:p>
@@ -13513,6 +13625,118 @@
       <p:sp>
         <p:nvSpPr>
           <p:cNvPr id="22" name="Shape 20"/>
+          <p:cNvSpPr/>
+          <p:nvPr/>
+        </p:nvSpPr>
+        <p:spPr>
+          <a:xfrm>
+            <a:off x="6519672" y="2258568"/>
+            <a:ext cx="1828800" cy="292608"/>
+          </a:xfrm>
+          <a:prstGeom prst="rect">
+            <a:avLst>
+              <a:gd name="adj" fmla="val 25000"/>
+            </a:avLst>
+          </a:prstGeom>
+          <a:solidFill>
+            <a:srgbClr val="FCE7F3"/>
+          </a:solidFill>
+          <a:ln w="19050">
+            <a:solidFill>
+              <a:srgbClr val="DB2777"/>
+            </a:solidFill>
+            <a:prstDash val="solid"/>
+          </a:ln>
+          <a:effectLst>
+            <a:outerShdw sx="100000" sy="100000" kx="0" ky="0" algn="bl" rotWithShape="0" blurRad="101600" dist="38100" dir="8100000">
+              <a:srgbClr val="000000">
+                <a:alpha val="12000"/>
+              </a:srgbClr>
+            </a:outerShdw>
+          </a:effectLst>
+        </p:spPr>
+      </p:sp>
+      <p:sp>
+        <p:nvSpPr>
+          <p:cNvPr id="23" name="Text 21"/>
+          <p:cNvSpPr/>
+          <p:nvPr/>
+        </p:nvSpPr>
+        <p:spPr>
+          <a:xfrm>
+            <a:off x="6519672" y="2258568"/>
+            <a:ext cx="1828800" cy="292608"/>
+          </a:xfrm>
+          <a:prstGeom prst="rect">
+            <a:avLst/>
+          </a:prstGeom>
+          <a:noFill/>
+          <a:ln/>
+        </p:spPr>
+        <p:txBody>
+          <a:bodyPr wrap="square" lIns="0" tIns="0" rIns="0" bIns="0" rtlCol="0" anchor="ctr"/>
+          <a:lstStyle/>
+          <a:p>
+            <a:pPr algn="ctr" indent="0" marL="0">
+              <a:buNone/>
+            </a:pPr>
+            <a:r>
+              <a:rPr lang="en-US" sz="1300" b="1" dirty="0">
+                <a:solidFill>
+                  <a:srgbClr val="9D174D"/>
+                </a:solidFill>
+                <a:latin typeface="Trebuchet MS" pitchFamily="34" charset="0"/>
+                <a:ea typeface="Trebuchet MS" pitchFamily="34" charset="-122"/>
+                <a:cs typeface="Trebuchet MS" pitchFamily="34" charset="-120"/>
+              </a:rPr>
+              <a:t>ing</a:t>
+            </a:r>
+            <a:endParaRPr lang="en-US" sz="1300" dirty="0"/>
+          </a:p>
+        </p:txBody>
+      </p:sp>
+      <p:sp>
+        <p:nvSpPr>
+          <p:cNvPr id="24" name="Text 22"/>
+          <p:cNvSpPr/>
+          <p:nvPr/>
+        </p:nvSpPr>
+        <p:spPr>
+          <a:xfrm>
+            <a:off x="6519672" y="2569464"/>
+            <a:ext cx="1828800" cy="201168"/>
+          </a:xfrm>
+          <a:prstGeom prst="rect">
+            <a:avLst/>
+          </a:prstGeom>
+          <a:noFill/>
+          <a:ln/>
+        </p:spPr>
+        <p:txBody>
+          <a:bodyPr wrap="square" lIns="0" tIns="0" rIns="0" bIns="0" rtlCol="0" anchor="t"/>
+          <a:lstStyle/>
+          <a:p>
+            <a:pPr algn="ctr" indent="0" marL="0">
+              <a:buNone/>
+            </a:pPr>
+            <a:r>
+              <a:rPr lang="en-US" sz="850" dirty="0">
+                <a:solidFill>
+                  <a:srgbClr val="475569"/>
+                </a:solidFill>
+                <a:latin typeface="Calibri" pitchFamily="34" charset="0"/>
+                <a:ea typeface="Calibri" pitchFamily="34" charset="-122"/>
+                <a:cs typeface="Calibri" pitchFamily="34" charset="-120"/>
+              </a:rPr>
+              <a:t>ongoing action</a:t>
+            </a:r>
+            <a:endParaRPr lang="en-US" sz="850" dirty="0"/>
+          </a:p>
+        </p:txBody>
+      </p:sp>
+      <p:sp>
+        <p:nvSpPr>
+          <p:cNvPr id="25" name="Shape 23"/>
           <p:cNvSpPr/>
           <p:nvPr/>
         </p:nvSpPr>
@@ -13539,7 +13763,7 @@
       </p:sp>
       <p:sp>
         <p:nvSpPr>
-          <p:cNvPr id="23" name="Text 21"/>
+          <p:cNvPr id="26" name="Text 24"/>
           <p:cNvSpPr/>
           <p:nvPr/>
         </p:nvSpPr>
@@ -13578,7 +13802,7 @@
       </p:sp>
       <p:sp>
         <p:nvSpPr>
-          <p:cNvPr id="24" name="Shape 22"/>
+          <p:cNvPr id="27" name="Shape 25"/>
           <p:cNvSpPr/>
           <p:nvPr/>
         </p:nvSpPr>
@@ -13605,14 +13829,14 @@
       </p:sp>
       <p:sp>
         <p:nvSpPr>
-          <p:cNvPr id="25" name="Shape 23"/>
-          <p:cNvSpPr/>
-          <p:nvPr/>
-        </p:nvSpPr>
-        <p:spPr>
-          <a:xfrm>
-            <a:off x="2313432" y="3364992"/>
-            <a:ext cx="1645920" cy="475488"/>
+          <p:cNvPr id="28" name="Shape 26"/>
+          <p:cNvSpPr/>
+          <p:nvPr/>
+        </p:nvSpPr>
+        <p:spPr>
+          <a:xfrm>
+            <a:off x="1975104" y="3364992"/>
+            <a:ext cx="1554480" cy="475488"/>
           </a:xfrm>
           <a:prstGeom prst="rect">
             <a:avLst>
@@ -13632,14 +13856,14 @@
       </p:sp>
       <p:sp>
         <p:nvSpPr>
-          <p:cNvPr id="26" name="Text 24"/>
-          <p:cNvSpPr/>
-          <p:nvPr/>
-        </p:nvSpPr>
-        <p:spPr>
-          <a:xfrm>
-            <a:off x="2313432" y="3364992"/>
-            <a:ext cx="1645920" cy="475488"/>
+          <p:cNvPr id="29" name="Text 27"/>
+          <p:cNvSpPr/>
+          <p:nvPr/>
+        </p:nvSpPr>
+        <p:spPr>
+          <a:xfrm>
+            <a:off x="1975104" y="3364992"/>
+            <a:ext cx="1554480" cy="475488"/>
           </a:xfrm>
           <a:prstGeom prst="rect">
             <a:avLst/>
@@ -13671,14 +13895,14 @@
       </p:sp>
       <p:sp>
         <p:nvSpPr>
-          <p:cNvPr id="27" name="Text 25"/>
-          <p:cNvSpPr/>
-          <p:nvPr/>
-        </p:nvSpPr>
-        <p:spPr>
-          <a:xfrm>
-            <a:off x="3959352" y="3364992"/>
-            <a:ext cx="411480" cy="475488"/>
+          <p:cNvPr id="30" name="Text 28"/>
+          <p:cNvSpPr/>
+          <p:nvPr/>
+        </p:nvSpPr>
+        <p:spPr>
+          <a:xfrm>
+            <a:off x="3529584" y="3364992"/>
+            <a:ext cx="73152" cy="475488"/>
           </a:xfrm>
           <a:prstGeom prst="rect">
             <a:avLst/>
@@ -13710,14 +13934,14 @@
       </p:sp>
       <p:sp>
         <p:nvSpPr>
-          <p:cNvPr id="28" name="Shape 26"/>
-          <p:cNvSpPr/>
-          <p:nvPr/>
-        </p:nvSpPr>
-        <p:spPr>
-          <a:xfrm>
-            <a:off x="4370832" y="3364992"/>
-            <a:ext cx="1645920" cy="475488"/>
+          <p:cNvPr id="31" name="Shape 29"/>
+          <p:cNvSpPr/>
+          <p:nvPr/>
+        </p:nvSpPr>
+        <p:spPr>
+          <a:xfrm>
+            <a:off x="3602736" y="3364992"/>
+            <a:ext cx="1554480" cy="475488"/>
           </a:xfrm>
           <a:prstGeom prst="rect">
             <a:avLst>
@@ -13737,14 +13961,14 @@
       </p:sp>
       <p:sp>
         <p:nvSpPr>
-          <p:cNvPr id="29" name="Text 27"/>
-          <p:cNvSpPr/>
-          <p:nvPr/>
-        </p:nvSpPr>
-        <p:spPr>
-          <a:xfrm>
-            <a:off x="4370832" y="3364992"/>
-            <a:ext cx="1645920" cy="475488"/>
+          <p:cNvPr id="32" name="Text 30"/>
+          <p:cNvSpPr/>
+          <p:nvPr/>
+        </p:nvSpPr>
+        <p:spPr>
+          <a:xfrm>
+            <a:off x="3602736" y="3364992"/>
+            <a:ext cx="1554480" cy="475488"/>
           </a:xfrm>
           <a:prstGeom prst="rect">
             <a:avLst/>
@@ -13776,14 +14000,14 @@
       </p:sp>
       <p:sp>
         <p:nvSpPr>
-          <p:cNvPr id="30" name="Text 28"/>
-          <p:cNvSpPr/>
-          <p:nvPr/>
-        </p:nvSpPr>
-        <p:spPr>
-          <a:xfrm>
-            <a:off x="6016752" y="3364992"/>
-            <a:ext cx="411480" cy="475488"/>
+          <p:cNvPr id="33" name="Text 31"/>
+          <p:cNvSpPr/>
+          <p:nvPr/>
+        </p:nvSpPr>
+        <p:spPr>
+          <a:xfrm>
+            <a:off x="5157216" y="3364992"/>
+            <a:ext cx="73152" cy="475488"/>
           </a:xfrm>
           <a:prstGeom prst="rect">
             <a:avLst/>
@@ -13815,14 +14039,14 @@
       </p:sp>
       <p:sp>
         <p:nvSpPr>
-          <p:cNvPr id="31" name="Shape 29"/>
-          <p:cNvSpPr/>
-          <p:nvPr/>
-        </p:nvSpPr>
-        <p:spPr>
-          <a:xfrm>
-            <a:off x="6428232" y="3364992"/>
-            <a:ext cx="1645920" cy="475488"/>
+          <p:cNvPr id="34" name="Shape 32"/>
+          <p:cNvSpPr/>
+          <p:nvPr/>
+        </p:nvSpPr>
+        <p:spPr>
+          <a:xfrm>
+            <a:off x="5230368" y="3364992"/>
+            <a:ext cx="1554480" cy="475488"/>
           </a:xfrm>
           <a:prstGeom prst="rect">
             <a:avLst>
@@ -13842,14 +14066,14 @@
       </p:sp>
       <p:sp>
         <p:nvSpPr>
-          <p:cNvPr id="32" name="Text 30"/>
-          <p:cNvSpPr/>
-          <p:nvPr/>
-        </p:nvSpPr>
-        <p:spPr>
-          <a:xfrm>
-            <a:off x="6428232" y="3364992"/>
-            <a:ext cx="1645920" cy="475488"/>
+          <p:cNvPr id="35" name="Text 33"/>
+          <p:cNvSpPr/>
+          <p:nvPr/>
+        </p:nvSpPr>
+        <p:spPr>
+          <a:xfrm>
+            <a:off x="5230368" y="3364992"/>
+            <a:ext cx="1554480" cy="475488"/>
           </a:xfrm>
           <a:prstGeom prst="rect">
             <a:avLst/>
@@ -13881,7 +14105,112 @@
       </p:sp>
       <p:sp>
         <p:nvSpPr>
-          <p:cNvPr id="33" name="Shape 31"/>
+          <p:cNvPr id="36" name="Text 34"/>
+          <p:cNvSpPr/>
+          <p:nvPr/>
+        </p:nvSpPr>
+        <p:spPr>
+          <a:xfrm>
+            <a:off x="6784848" y="3364992"/>
+            <a:ext cx="73152" cy="475488"/>
+          </a:xfrm>
+          <a:prstGeom prst="rect">
+            <a:avLst/>
+          </a:prstGeom>
+          <a:noFill/>
+          <a:ln/>
+        </p:spPr>
+        <p:txBody>
+          <a:bodyPr wrap="square" lIns="0" tIns="0" rIns="0" bIns="0" rtlCol="0" anchor="ctr"/>
+          <a:lstStyle/>
+          <a:p>
+            <a:pPr algn="ctr" indent="0" marL="0">
+              <a:buNone/>
+            </a:pPr>
+            <a:r>
+              <a:rPr lang="en-US" sz="1600" b="1" dirty="0">
+                <a:solidFill>
+                  <a:srgbClr val="0D9488"/>
+                </a:solidFill>
+                <a:latin typeface="Trebuchet MS" pitchFamily="34" charset="0"/>
+                <a:ea typeface="Trebuchet MS" pitchFamily="34" charset="-122"/>
+                <a:cs typeface="Trebuchet MS" pitchFamily="34" charset="-120"/>
+              </a:rPr>
+              <a:t>·</a:t>
+            </a:r>
+            <a:endParaRPr lang="en-US" sz="1600" dirty="0"/>
+          </a:p>
+        </p:txBody>
+      </p:sp>
+      <p:sp>
+        <p:nvSpPr>
+          <p:cNvPr id="37" name="Shape 35"/>
+          <p:cNvSpPr/>
+          <p:nvPr/>
+        </p:nvSpPr>
+        <p:spPr>
+          <a:xfrm>
+            <a:off x="6858000" y="3364992"/>
+            <a:ext cx="1554480" cy="475488"/>
+          </a:xfrm>
+          <a:prstGeom prst="rect">
+            <a:avLst>
+              <a:gd name="adj" fmla="val 9615"/>
+            </a:avLst>
+          </a:prstGeom>
+          <a:solidFill>
+            <a:srgbClr val="FFFFFF"/>
+          </a:solidFill>
+          <a:ln w="12700">
+            <a:solidFill>
+              <a:srgbClr val="0D9488"/>
+            </a:solidFill>
+            <a:prstDash val="solid"/>
+          </a:ln>
+        </p:spPr>
+      </p:sp>
+      <p:sp>
+        <p:nvSpPr>
+          <p:cNvPr id="38" name="Text 36"/>
+          <p:cNvSpPr/>
+          <p:nvPr/>
+        </p:nvSpPr>
+        <p:spPr>
+          <a:xfrm>
+            <a:off x="6858000" y="3364992"/>
+            <a:ext cx="1554480" cy="475488"/>
+          </a:xfrm>
+          <a:prstGeom prst="rect">
+            <a:avLst/>
+          </a:prstGeom>
+          <a:noFill/>
+          <a:ln/>
+        </p:spPr>
+        <p:txBody>
+          <a:bodyPr wrap="square" lIns="0" tIns="0" rIns="0" bIns="0" rtlCol="0" anchor="ctr"/>
+          <a:lstStyle/>
+          <a:p>
+            <a:pPr algn="ctr" indent="0" marL="0">
+              <a:buNone/>
+            </a:pPr>
+            <a:r>
+              <a:rPr lang="en-US" sz="1400" b="1" dirty="0">
+                <a:solidFill>
+                  <a:srgbClr val="0D9488"/>
+                </a:solidFill>
+                <a:latin typeface="Trebuchet MS" pitchFamily="34" charset="0"/>
+                <a:ea typeface="Trebuchet MS" pitchFamily="34" charset="-122"/>
+                <a:cs typeface="Trebuchet MS" pitchFamily="34" charset="-120"/>
+              </a:rPr>
+              <a:t>ing</a:t>
+            </a:r>
+            <a:endParaRPr lang="en-US" sz="1400" dirty="0"/>
+          </a:p>
+        </p:txBody>
+      </p:sp>
+      <p:sp>
+        <p:nvSpPr>
+          <p:cNvPr id="39" name="Shape 37"/>
           <p:cNvSpPr/>
           <p:nvPr/>
         </p:nvSpPr>
@@ -13908,7 +14237,7 @@
       </p:sp>
       <p:sp>
         <p:nvSpPr>
-          <p:cNvPr id="34" name="Text 32"/>
+          <p:cNvPr id="40" name="Text 38"/>
           <p:cNvSpPr/>
           <p:nvPr/>
         </p:nvSpPr>
@@ -13947,7 +14276,7 @@
       </p:sp>
       <p:sp>
         <p:nvSpPr>
-          <p:cNvPr id="35" name="Shape 33"/>
+          <p:cNvPr id="41" name="Shape 39"/>
           <p:cNvSpPr/>
           <p:nvPr/>
         </p:nvSpPr>
@@ -13974,7 +14303,7 @@
       </p:sp>
       <p:sp>
         <p:nvSpPr>
-          <p:cNvPr id="36" name="Text 34"/>
+          <p:cNvPr id="42" name="Text 40"/>
           <p:cNvSpPr/>
           <p:nvPr/>
         </p:nvSpPr>
@@ -14206,7 +14535,7 @@
                 <a:ea typeface="Calibri" pitchFamily="34" charset="-122"/>
                 <a:cs typeface="Calibri" pitchFamily="34" charset="-120"/>
               </a:rPr>
-              <a:t>Root 'order' — arrange, sequence, command</a:t>
+              <a:t>Root 'order' — arrangement, sequence, command</a:t>
             </a:r>
             <a:endParaRPr lang="en-US" sz="1600" dirty="0"/>
           </a:p>
@@ -14562,7 +14891,7 @@
                 <a:ea typeface="Calibri" pitchFamily="34" charset="-122"/>
                 <a:cs typeface="Calibri" pitchFamily="34" charset="-120"/>
               </a:rPr>
-              <a:t>Word Labs  •  wordlabs.app  •  Root: 'order' = arrange, sequence, command</a:t>
+              <a:t>Word Labs  •  wordlabs.app  •  Root: 'order' = arrangement, sequence, command</a:t>
             </a:r>
             <a:endParaRPr lang="en-US" sz="800" dirty="0"/>
           </a:p>
@@ -14701,7 +15030,7 @@
                 <a:ea typeface="Trebuchet MS" pitchFamily="34" charset="-122"/>
                 <a:cs typeface="Trebuchet MS" pitchFamily="34" charset="-120"/>
               </a:rPr>
-              <a:t>reorder</a:t>
+              <a:t>reordering</a:t>
             </a:r>
             <a:endParaRPr lang="en-US" sz="2800" dirty="0"/>
           </a:p>
@@ -14781,7 +15110,7 @@
         </p:nvSpPr>
         <p:spPr>
           <a:xfrm>
-            <a:off x="2938272" y="2258568"/>
+            <a:off x="2221992" y="2258568"/>
             <a:ext cx="1828800" cy="292608"/>
           </a:xfrm>
           <a:prstGeom prst="rect">
@@ -14815,7 +15144,7 @@
         </p:nvSpPr>
         <p:spPr>
           <a:xfrm>
-            <a:off x="2938272" y="2258568"/>
+            <a:off x="2221992" y="2258568"/>
             <a:ext cx="1828800" cy="292608"/>
           </a:xfrm>
           <a:prstGeom prst="rect">
@@ -14854,7 +15183,7 @@
         </p:nvSpPr>
         <p:spPr>
           <a:xfrm>
-            <a:off x="2938272" y="2569464"/>
+            <a:off x="2221992" y="2569464"/>
             <a:ext cx="1828800" cy="201168"/>
           </a:xfrm>
           <a:prstGeom prst="rect">
@@ -14893,7 +15222,7 @@
         </p:nvSpPr>
         <p:spPr>
           <a:xfrm>
-            <a:off x="5803392" y="2258568"/>
+            <a:off x="4370832" y="2258568"/>
             <a:ext cx="1828800" cy="292608"/>
           </a:xfrm>
           <a:prstGeom prst="rect">
@@ -14927,7 +15256,7 @@
         </p:nvSpPr>
         <p:spPr>
           <a:xfrm>
-            <a:off x="5803392" y="2258568"/>
+            <a:off x="4370832" y="2258568"/>
             <a:ext cx="1828800" cy="292608"/>
           </a:xfrm>
           <a:prstGeom prst="rect">
@@ -14966,7 +15295,7 @@
         </p:nvSpPr>
         <p:spPr>
           <a:xfrm>
-            <a:off x="5803392" y="2569464"/>
+            <a:off x="4370832" y="2569464"/>
             <a:ext cx="1828800" cy="201168"/>
           </a:xfrm>
           <a:prstGeom prst="rect">
@@ -14991,7 +15320,7 @@
                 <a:ea typeface="Calibri" pitchFamily="34" charset="-122"/>
                 <a:cs typeface="Calibri" pitchFamily="34" charset="-120"/>
               </a:rPr>
-              <a:t>arrange, sequence</a:t>
+              <a:t>arrangement, sequence</a:t>
             </a:r>
             <a:endParaRPr lang="en-US" sz="850" dirty="0"/>
           </a:p>
@@ -15000,6 +15329,118 @@
       <p:sp>
         <p:nvSpPr>
           <p:cNvPr id="22" name="Shape 20"/>
+          <p:cNvSpPr/>
+          <p:nvPr/>
+        </p:nvSpPr>
+        <p:spPr>
+          <a:xfrm>
+            <a:off x="6519672" y="2258568"/>
+            <a:ext cx="1828800" cy="292608"/>
+          </a:xfrm>
+          <a:prstGeom prst="rect">
+            <a:avLst>
+              <a:gd name="adj" fmla="val 25000"/>
+            </a:avLst>
+          </a:prstGeom>
+          <a:solidFill>
+            <a:srgbClr val="FCE7F3"/>
+          </a:solidFill>
+          <a:ln w="19050">
+            <a:solidFill>
+              <a:srgbClr val="DB2777"/>
+            </a:solidFill>
+            <a:prstDash val="solid"/>
+          </a:ln>
+          <a:effectLst>
+            <a:outerShdw sx="100000" sy="100000" kx="0" ky="0" algn="bl" rotWithShape="0" blurRad="101600" dist="38100" dir="8100000">
+              <a:srgbClr val="000000">
+                <a:alpha val="12000"/>
+              </a:srgbClr>
+            </a:outerShdw>
+          </a:effectLst>
+        </p:spPr>
+      </p:sp>
+      <p:sp>
+        <p:nvSpPr>
+          <p:cNvPr id="23" name="Text 21"/>
+          <p:cNvSpPr/>
+          <p:nvPr/>
+        </p:nvSpPr>
+        <p:spPr>
+          <a:xfrm>
+            <a:off x="6519672" y="2258568"/>
+            <a:ext cx="1828800" cy="292608"/>
+          </a:xfrm>
+          <a:prstGeom prst="rect">
+            <a:avLst/>
+          </a:prstGeom>
+          <a:noFill/>
+          <a:ln/>
+        </p:spPr>
+        <p:txBody>
+          <a:bodyPr wrap="square" lIns="0" tIns="0" rIns="0" bIns="0" rtlCol="0" anchor="ctr"/>
+          <a:lstStyle/>
+          <a:p>
+            <a:pPr algn="ctr" indent="0" marL="0">
+              <a:buNone/>
+            </a:pPr>
+            <a:r>
+              <a:rPr lang="en-US" sz="1300" b="1" dirty="0">
+                <a:solidFill>
+                  <a:srgbClr val="9D174D"/>
+                </a:solidFill>
+                <a:latin typeface="Trebuchet MS" pitchFamily="34" charset="0"/>
+                <a:ea typeface="Trebuchet MS" pitchFamily="34" charset="-122"/>
+                <a:cs typeface="Trebuchet MS" pitchFamily="34" charset="-120"/>
+              </a:rPr>
+              <a:t>ing</a:t>
+            </a:r>
+            <a:endParaRPr lang="en-US" sz="1300" dirty="0"/>
+          </a:p>
+        </p:txBody>
+      </p:sp>
+      <p:sp>
+        <p:nvSpPr>
+          <p:cNvPr id="24" name="Text 22"/>
+          <p:cNvSpPr/>
+          <p:nvPr/>
+        </p:nvSpPr>
+        <p:spPr>
+          <a:xfrm>
+            <a:off x="6519672" y="2569464"/>
+            <a:ext cx="1828800" cy="201168"/>
+          </a:xfrm>
+          <a:prstGeom prst="rect">
+            <a:avLst/>
+          </a:prstGeom>
+          <a:noFill/>
+          <a:ln/>
+        </p:spPr>
+        <p:txBody>
+          <a:bodyPr wrap="square" lIns="0" tIns="0" rIns="0" bIns="0" rtlCol="0" anchor="t"/>
+          <a:lstStyle/>
+          <a:p>
+            <a:pPr algn="ctr" indent="0" marL="0">
+              <a:buNone/>
+            </a:pPr>
+            <a:r>
+              <a:rPr lang="en-US" sz="850" dirty="0">
+                <a:solidFill>
+                  <a:srgbClr val="475569"/>
+                </a:solidFill>
+                <a:latin typeface="Calibri" pitchFamily="34" charset="0"/>
+                <a:ea typeface="Calibri" pitchFamily="34" charset="-122"/>
+                <a:cs typeface="Calibri" pitchFamily="34" charset="-120"/>
+              </a:rPr>
+              <a:t>ongoing action</a:t>
+            </a:r>
+            <a:endParaRPr lang="en-US" sz="850" dirty="0"/>
+          </a:p>
+        </p:txBody>
+      </p:sp>
+      <p:sp>
+        <p:nvSpPr>
+          <p:cNvPr id="25" name="Shape 23"/>
           <p:cNvSpPr/>
           <p:nvPr/>
         </p:nvSpPr>
@@ -15026,7 +15467,7 @@
       </p:sp>
       <p:sp>
         <p:nvSpPr>
-          <p:cNvPr id="23" name="Text 21"/>
+          <p:cNvPr id="26" name="Text 24"/>
           <p:cNvSpPr/>
           <p:nvPr/>
         </p:nvSpPr>
@@ -15065,7 +15506,7 @@
       </p:sp>
       <p:sp>
         <p:nvSpPr>
-          <p:cNvPr id="24" name="Shape 22"/>
+          <p:cNvPr id="27" name="Shape 25"/>
           <p:cNvSpPr/>
           <p:nvPr/>
         </p:nvSpPr>
@@ -15092,14 +15533,14 @@
       </p:sp>
       <p:sp>
         <p:nvSpPr>
-          <p:cNvPr id="25" name="Shape 23"/>
-          <p:cNvSpPr/>
-          <p:nvPr/>
-        </p:nvSpPr>
-        <p:spPr>
-          <a:xfrm>
-            <a:off x="2313432" y="3364992"/>
-            <a:ext cx="1645920" cy="475488"/>
+          <p:cNvPr id="28" name="Shape 26"/>
+          <p:cNvSpPr/>
+          <p:nvPr/>
+        </p:nvSpPr>
+        <p:spPr>
+          <a:xfrm>
+            <a:off x="1975104" y="3364992"/>
+            <a:ext cx="1554480" cy="475488"/>
           </a:xfrm>
           <a:prstGeom prst="rect">
             <a:avLst>
@@ -15119,14 +15560,14 @@
       </p:sp>
       <p:sp>
         <p:nvSpPr>
-          <p:cNvPr id="26" name="Text 24"/>
-          <p:cNvSpPr/>
-          <p:nvPr/>
-        </p:nvSpPr>
-        <p:spPr>
-          <a:xfrm>
-            <a:off x="2313432" y="3364992"/>
-            <a:ext cx="1645920" cy="475488"/>
+          <p:cNvPr id="29" name="Text 27"/>
+          <p:cNvSpPr/>
+          <p:nvPr/>
+        </p:nvSpPr>
+        <p:spPr>
+          <a:xfrm>
+            <a:off x="1975104" y="3364992"/>
+            <a:ext cx="1554480" cy="475488"/>
           </a:xfrm>
           <a:prstGeom prst="rect">
             <a:avLst/>
@@ -15158,14 +15599,14 @@
       </p:sp>
       <p:sp>
         <p:nvSpPr>
-          <p:cNvPr id="27" name="Text 25"/>
-          <p:cNvSpPr/>
-          <p:nvPr/>
-        </p:nvSpPr>
-        <p:spPr>
-          <a:xfrm>
-            <a:off x="3959352" y="3364992"/>
-            <a:ext cx="411480" cy="475488"/>
+          <p:cNvPr id="30" name="Text 28"/>
+          <p:cNvSpPr/>
+          <p:nvPr/>
+        </p:nvSpPr>
+        <p:spPr>
+          <a:xfrm>
+            <a:off x="3529584" y="3364992"/>
+            <a:ext cx="73152" cy="475488"/>
           </a:xfrm>
           <a:prstGeom prst="rect">
             <a:avLst/>
@@ -15197,14 +15638,14 @@
       </p:sp>
       <p:sp>
         <p:nvSpPr>
-          <p:cNvPr id="28" name="Shape 26"/>
-          <p:cNvSpPr/>
-          <p:nvPr/>
-        </p:nvSpPr>
-        <p:spPr>
-          <a:xfrm>
-            <a:off x="4370832" y="3364992"/>
-            <a:ext cx="1645920" cy="475488"/>
+          <p:cNvPr id="31" name="Shape 29"/>
+          <p:cNvSpPr/>
+          <p:nvPr/>
+        </p:nvSpPr>
+        <p:spPr>
+          <a:xfrm>
+            <a:off x="3602736" y="3364992"/>
+            <a:ext cx="1554480" cy="475488"/>
           </a:xfrm>
           <a:prstGeom prst="rect">
             <a:avLst>
@@ -15224,14 +15665,14 @@
       </p:sp>
       <p:sp>
         <p:nvSpPr>
-          <p:cNvPr id="29" name="Text 27"/>
-          <p:cNvSpPr/>
-          <p:nvPr/>
-        </p:nvSpPr>
-        <p:spPr>
-          <a:xfrm>
-            <a:off x="4370832" y="3364992"/>
-            <a:ext cx="1645920" cy="475488"/>
+          <p:cNvPr id="32" name="Text 30"/>
+          <p:cNvSpPr/>
+          <p:nvPr/>
+        </p:nvSpPr>
+        <p:spPr>
+          <a:xfrm>
+            <a:off x="3602736" y="3364992"/>
+            <a:ext cx="1554480" cy="475488"/>
           </a:xfrm>
           <a:prstGeom prst="rect">
             <a:avLst/>
@@ -15263,14 +15704,14 @@
       </p:sp>
       <p:sp>
         <p:nvSpPr>
-          <p:cNvPr id="30" name="Text 28"/>
-          <p:cNvSpPr/>
-          <p:nvPr/>
-        </p:nvSpPr>
-        <p:spPr>
-          <a:xfrm>
-            <a:off x="6016752" y="3364992"/>
-            <a:ext cx="411480" cy="475488"/>
+          <p:cNvPr id="33" name="Text 31"/>
+          <p:cNvSpPr/>
+          <p:nvPr/>
+        </p:nvSpPr>
+        <p:spPr>
+          <a:xfrm>
+            <a:off x="5157216" y="3364992"/>
+            <a:ext cx="73152" cy="475488"/>
           </a:xfrm>
           <a:prstGeom prst="rect">
             <a:avLst/>
@@ -15302,14 +15743,14 @@
       </p:sp>
       <p:sp>
         <p:nvSpPr>
-          <p:cNvPr id="31" name="Shape 29"/>
-          <p:cNvSpPr/>
-          <p:nvPr/>
-        </p:nvSpPr>
-        <p:spPr>
-          <a:xfrm>
-            <a:off x="6428232" y="3364992"/>
-            <a:ext cx="1645920" cy="475488"/>
+          <p:cNvPr id="34" name="Shape 32"/>
+          <p:cNvSpPr/>
+          <p:nvPr/>
+        </p:nvSpPr>
+        <p:spPr>
+          <a:xfrm>
+            <a:off x="5230368" y="3364992"/>
+            <a:ext cx="1554480" cy="475488"/>
           </a:xfrm>
           <a:prstGeom prst="rect">
             <a:avLst>
@@ -15329,14 +15770,14 @@
       </p:sp>
       <p:sp>
         <p:nvSpPr>
-          <p:cNvPr id="32" name="Text 30"/>
-          <p:cNvSpPr/>
-          <p:nvPr/>
-        </p:nvSpPr>
-        <p:spPr>
-          <a:xfrm>
-            <a:off x="6428232" y="3364992"/>
-            <a:ext cx="1645920" cy="475488"/>
+          <p:cNvPr id="35" name="Text 33"/>
+          <p:cNvSpPr/>
+          <p:nvPr/>
+        </p:nvSpPr>
+        <p:spPr>
+          <a:xfrm>
+            <a:off x="5230368" y="3364992"/>
+            <a:ext cx="1554480" cy="475488"/>
           </a:xfrm>
           <a:prstGeom prst="rect">
             <a:avLst/>
@@ -15368,7 +15809,112 @@
       </p:sp>
       <p:sp>
         <p:nvSpPr>
-          <p:cNvPr id="33" name="Shape 31"/>
+          <p:cNvPr id="36" name="Text 34"/>
+          <p:cNvSpPr/>
+          <p:nvPr/>
+        </p:nvSpPr>
+        <p:spPr>
+          <a:xfrm>
+            <a:off x="6784848" y="3364992"/>
+            <a:ext cx="73152" cy="475488"/>
+          </a:xfrm>
+          <a:prstGeom prst="rect">
+            <a:avLst/>
+          </a:prstGeom>
+          <a:noFill/>
+          <a:ln/>
+        </p:spPr>
+        <p:txBody>
+          <a:bodyPr wrap="square" lIns="0" tIns="0" rIns="0" bIns="0" rtlCol="0" anchor="ctr"/>
+          <a:lstStyle/>
+          <a:p>
+            <a:pPr algn="ctr" indent="0" marL="0">
+              <a:buNone/>
+            </a:pPr>
+            <a:r>
+              <a:rPr lang="en-US" sz="1600" b="1" dirty="0">
+                <a:solidFill>
+                  <a:srgbClr val="0D9488"/>
+                </a:solidFill>
+                <a:latin typeface="Trebuchet MS" pitchFamily="34" charset="0"/>
+                <a:ea typeface="Trebuchet MS" pitchFamily="34" charset="-122"/>
+                <a:cs typeface="Trebuchet MS" pitchFamily="34" charset="-120"/>
+              </a:rPr>
+              <a:t>·</a:t>
+            </a:r>
+            <a:endParaRPr lang="en-US" sz="1600" dirty="0"/>
+          </a:p>
+        </p:txBody>
+      </p:sp>
+      <p:sp>
+        <p:nvSpPr>
+          <p:cNvPr id="37" name="Shape 35"/>
+          <p:cNvSpPr/>
+          <p:nvPr/>
+        </p:nvSpPr>
+        <p:spPr>
+          <a:xfrm>
+            <a:off x="6858000" y="3364992"/>
+            <a:ext cx="1554480" cy="475488"/>
+          </a:xfrm>
+          <a:prstGeom prst="rect">
+            <a:avLst>
+              <a:gd name="adj" fmla="val 9615"/>
+            </a:avLst>
+          </a:prstGeom>
+          <a:solidFill>
+            <a:srgbClr val="FFFFFF"/>
+          </a:solidFill>
+          <a:ln w="12700">
+            <a:solidFill>
+              <a:srgbClr val="0D9488"/>
+            </a:solidFill>
+            <a:prstDash val="solid"/>
+          </a:ln>
+        </p:spPr>
+      </p:sp>
+      <p:sp>
+        <p:nvSpPr>
+          <p:cNvPr id="38" name="Text 36"/>
+          <p:cNvSpPr/>
+          <p:nvPr/>
+        </p:nvSpPr>
+        <p:spPr>
+          <a:xfrm>
+            <a:off x="6858000" y="3364992"/>
+            <a:ext cx="1554480" cy="475488"/>
+          </a:xfrm>
+          <a:prstGeom prst="rect">
+            <a:avLst/>
+          </a:prstGeom>
+          <a:noFill/>
+          <a:ln/>
+        </p:spPr>
+        <p:txBody>
+          <a:bodyPr wrap="square" lIns="0" tIns="0" rIns="0" bIns="0" rtlCol="0" anchor="ctr"/>
+          <a:lstStyle/>
+          <a:p>
+            <a:pPr algn="ctr" indent="0" marL="0">
+              <a:buNone/>
+            </a:pPr>
+            <a:r>
+              <a:rPr lang="en-US" sz="1400" b="1" dirty="0">
+                <a:solidFill>
+                  <a:srgbClr val="0D9488"/>
+                </a:solidFill>
+                <a:latin typeface="Trebuchet MS" pitchFamily="34" charset="0"/>
+                <a:ea typeface="Trebuchet MS" pitchFamily="34" charset="-122"/>
+                <a:cs typeface="Trebuchet MS" pitchFamily="34" charset="-120"/>
+              </a:rPr>
+              <a:t>ing</a:t>
+            </a:r>
+            <a:endParaRPr lang="en-US" sz="1400" dirty="0"/>
+          </a:p>
+        </p:txBody>
+      </p:sp>
+      <p:sp>
+        <p:nvSpPr>
+          <p:cNvPr id="39" name="Shape 37"/>
           <p:cNvSpPr/>
           <p:nvPr/>
         </p:nvSpPr>
@@ -15395,7 +15941,7 @@
       </p:sp>
       <p:sp>
         <p:nvSpPr>
-          <p:cNvPr id="34" name="Text 32"/>
+          <p:cNvPr id="40" name="Text 38"/>
           <p:cNvSpPr/>
           <p:nvPr/>
         </p:nvSpPr>
@@ -15434,7 +15980,7 @@
       </p:sp>
       <p:sp>
         <p:nvSpPr>
-          <p:cNvPr id="35" name="Shape 33"/>
+          <p:cNvPr id="41" name="Shape 39"/>
           <p:cNvSpPr/>
           <p:nvPr/>
         </p:nvSpPr>
@@ -15461,13 +16007,13 @@
       </p:sp>
       <p:sp>
         <p:nvSpPr>
-          <p:cNvPr id="36" name="Shape 34"/>
-          <p:cNvSpPr/>
-          <p:nvPr/>
-        </p:nvSpPr>
-        <p:spPr>
-          <a:xfrm>
-            <a:off x="2427732" y="4169664"/>
+          <p:cNvPr id="42" name="Shape 40"/>
+          <p:cNvSpPr/>
+          <p:nvPr/>
+        </p:nvSpPr>
+        <p:spPr>
+          <a:xfrm>
+            <a:off x="2124837" y="4169664"/>
             <a:ext cx="685800" cy="475488"/>
           </a:xfrm>
           <a:prstGeom prst="rect">
@@ -15488,13 +16034,13 @@
       </p:sp>
       <p:sp>
         <p:nvSpPr>
-          <p:cNvPr id="37" name="Text 35"/>
-          <p:cNvSpPr/>
-          <p:nvPr/>
-        </p:nvSpPr>
-        <p:spPr>
-          <a:xfrm>
-            <a:off x="2427732" y="4169664"/>
+          <p:cNvPr id="43" name="Text 41"/>
+          <p:cNvSpPr/>
+          <p:nvPr/>
+        </p:nvSpPr>
+        <p:spPr>
+          <a:xfrm>
+            <a:off x="2124837" y="4169664"/>
             <a:ext cx="685800" cy="475488"/>
           </a:xfrm>
           <a:prstGeom prst="rect">
@@ -15527,13 +16073,13 @@
       </p:sp>
       <p:sp>
         <p:nvSpPr>
-          <p:cNvPr id="38" name="Shape 36"/>
-          <p:cNvSpPr/>
-          <p:nvPr/>
-        </p:nvSpPr>
-        <p:spPr>
-          <a:xfrm>
-            <a:off x="3639312" y="4169664"/>
+          <p:cNvPr id="44" name="Shape 42"/>
+          <p:cNvSpPr/>
+          <p:nvPr/>
+        </p:nvSpPr>
+        <p:spPr>
+          <a:xfrm>
+            <a:off x="3033522" y="4169664"/>
             <a:ext cx="685800" cy="475488"/>
           </a:xfrm>
           <a:prstGeom prst="rect">
@@ -15554,13 +16100,13 @@
       </p:sp>
       <p:sp>
         <p:nvSpPr>
-          <p:cNvPr id="39" name="Text 37"/>
-          <p:cNvSpPr/>
-          <p:nvPr/>
-        </p:nvSpPr>
-        <p:spPr>
-          <a:xfrm>
-            <a:off x="3639312" y="4169664"/>
+          <p:cNvPr id="45" name="Text 43"/>
+          <p:cNvSpPr/>
+          <p:nvPr/>
+        </p:nvSpPr>
+        <p:spPr>
+          <a:xfrm>
+            <a:off x="3033522" y="4169664"/>
             <a:ext cx="685800" cy="475488"/>
           </a:xfrm>
           <a:prstGeom prst="rect">
@@ -15593,13 +16139,13 @@
       </p:sp>
       <p:sp>
         <p:nvSpPr>
-          <p:cNvPr id="40" name="Shape 38"/>
-          <p:cNvSpPr/>
-          <p:nvPr/>
-        </p:nvSpPr>
-        <p:spPr>
-          <a:xfrm>
-            <a:off x="4850892" y="4169664"/>
+          <p:cNvPr id="46" name="Shape 44"/>
+          <p:cNvSpPr/>
+          <p:nvPr/>
+        </p:nvSpPr>
+        <p:spPr>
+          <a:xfrm>
+            <a:off x="3942207" y="4169664"/>
             <a:ext cx="685800" cy="475488"/>
           </a:xfrm>
           <a:prstGeom prst="rect">
@@ -15620,13 +16166,13 @@
       </p:sp>
       <p:sp>
         <p:nvSpPr>
-          <p:cNvPr id="41" name="Text 39"/>
-          <p:cNvSpPr/>
-          <p:nvPr/>
-        </p:nvSpPr>
-        <p:spPr>
-          <a:xfrm>
-            <a:off x="4850892" y="4169664"/>
+          <p:cNvPr id="47" name="Text 45"/>
+          <p:cNvSpPr/>
+          <p:nvPr/>
+        </p:nvSpPr>
+        <p:spPr>
+          <a:xfrm>
+            <a:off x="3942207" y="4169664"/>
             <a:ext cx="685800" cy="475488"/>
           </a:xfrm>
           <a:prstGeom prst="rect">
@@ -15659,13 +16205,13 @@
       </p:sp>
       <p:sp>
         <p:nvSpPr>
-          <p:cNvPr id="42" name="Shape 40"/>
-          <p:cNvSpPr/>
-          <p:nvPr/>
-        </p:nvSpPr>
-        <p:spPr>
-          <a:xfrm>
-            <a:off x="6062472" y="4169664"/>
+          <p:cNvPr id="48" name="Shape 46"/>
+          <p:cNvSpPr/>
+          <p:nvPr/>
+        </p:nvSpPr>
+        <p:spPr>
+          <a:xfrm>
+            <a:off x="4850892" y="4169664"/>
             <a:ext cx="685800" cy="475488"/>
           </a:xfrm>
           <a:prstGeom prst="rect">
@@ -15686,13 +16232,13 @@
       </p:sp>
       <p:sp>
         <p:nvSpPr>
-          <p:cNvPr id="43" name="Text 41"/>
-          <p:cNvSpPr/>
-          <p:nvPr/>
-        </p:nvSpPr>
-        <p:spPr>
-          <a:xfrm>
-            <a:off x="6062472" y="4169664"/>
+          <p:cNvPr id="49" name="Text 47"/>
+          <p:cNvSpPr/>
+          <p:nvPr/>
+        </p:nvSpPr>
+        <p:spPr>
+          <a:xfrm>
+            <a:off x="4850892" y="4169664"/>
             <a:ext cx="685800" cy="475488"/>
           </a:xfrm>
           <a:prstGeom prst="rect">
@@ -15725,13 +16271,13 @@
       </p:sp>
       <p:sp>
         <p:nvSpPr>
-          <p:cNvPr id="44" name="Shape 42"/>
-          <p:cNvSpPr/>
-          <p:nvPr/>
-        </p:nvSpPr>
-        <p:spPr>
-          <a:xfrm>
-            <a:off x="7274052" y="4169664"/>
+          <p:cNvPr id="50" name="Shape 48"/>
+          <p:cNvSpPr/>
+          <p:nvPr/>
+        </p:nvSpPr>
+        <p:spPr>
+          <a:xfrm>
+            <a:off x="5759577" y="4169664"/>
             <a:ext cx="685800" cy="475488"/>
           </a:xfrm>
           <a:prstGeom prst="rect">
@@ -15752,13 +16298,13 @@
       </p:sp>
       <p:sp>
         <p:nvSpPr>
-          <p:cNvPr id="45" name="Text 43"/>
-          <p:cNvSpPr/>
-          <p:nvPr/>
-        </p:nvSpPr>
-        <p:spPr>
-          <a:xfrm>
-            <a:off x="7274052" y="4169664"/>
+          <p:cNvPr id="51" name="Text 49"/>
+          <p:cNvSpPr/>
+          <p:nvPr/>
+        </p:nvSpPr>
+        <p:spPr>
+          <a:xfrm>
+            <a:off x="5759577" y="4169664"/>
             <a:ext cx="685800" cy="475488"/>
           </a:xfrm>
           <a:prstGeom prst="rect">
@@ -15784,6 +16330,138 @@
                 <a:cs typeface="Trebuchet MS" pitchFamily="34" charset="-120"/>
               </a:rPr>
               <a:t>er</a:t>
+            </a:r>
+            <a:endParaRPr lang="en-US" sz="900" dirty="0"/>
+          </a:p>
+        </p:txBody>
+      </p:sp>
+      <p:sp>
+        <p:nvSpPr>
+          <p:cNvPr id="52" name="Shape 50"/>
+          <p:cNvSpPr/>
+          <p:nvPr/>
+        </p:nvSpPr>
+        <p:spPr>
+          <a:xfrm>
+            <a:off x="6668262" y="4169664"/>
+            <a:ext cx="685800" cy="475488"/>
+          </a:xfrm>
+          <a:prstGeom prst="rect">
+            <a:avLst>
+              <a:gd name="adj" fmla="val 7692"/>
+            </a:avLst>
+          </a:prstGeom>
+          <a:solidFill>
+            <a:srgbClr val="FFFFFF"/>
+          </a:solidFill>
+          <a:ln w="12700">
+            <a:solidFill>
+              <a:srgbClr val="DB2777"/>
+            </a:solidFill>
+            <a:prstDash val="solid"/>
+          </a:ln>
+        </p:spPr>
+      </p:sp>
+      <p:sp>
+        <p:nvSpPr>
+          <p:cNvPr id="53" name="Text 51"/>
+          <p:cNvSpPr/>
+          <p:nvPr/>
+        </p:nvSpPr>
+        <p:spPr>
+          <a:xfrm>
+            <a:off x="6668262" y="4169664"/>
+            <a:ext cx="685800" cy="475488"/>
+          </a:xfrm>
+          <a:prstGeom prst="rect">
+            <a:avLst/>
+          </a:prstGeom>
+          <a:noFill/>
+          <a:ln/>
+        </p:spPr>
+        <p:txBody>
+          <a:bodyPr wrap="square" lIns="0" tIns="0" rIns="0" bIns="0" rtlCol="0" anchor="ctr"/>
+          <a:lstStyle/>
+          <a:p>
+            <a:pPr algn="ctr" indent="0" marL="0">
+              <a:buNone/>
+            </a:pPr>
+            <a:r>
+              <a:rPr lang="en-US" sz="900" b="1" dirty="0">
+                <a:solidFill>
+                  <a:srgbClr val="9D174D"/>
+                </a:solidFill>
+                <a:latin typeface="Trebuchet MS" pitchFamily="34" charset="0"/>
+                <a:ea typeface="Trebuchet MS" pitchFamily="34" charset="-122"/>
+                <a:cs typeface="Trebuchet MS" pitchFamily="34" charset="-120"/>
+              </a:rPr>
+              <a:t>i</a:t>
+            </a:r>
+            <a:endParaRPr lang="en-US" sz="900" dirty="0"/>
+          </a:p>
+        </p:txBody>
+      </p:sp>
+      <p:sp>
+        <p:nvSpPr>
+          <p:cNvPr id="54" name="Shape 52"/>
+          <p:cNvSpPr/>
+          <p:nvPr/>
+        </p:nvSpPr>
+        <p:spPr>
+          <a:xfrm>
+            <a:off x="7576947" y="4169664"/>
+            <a:ext cx="685800" cy="475488"/>
+          </a:xfrm>
+          <a:prstGeom prst="rect">
+            <a:avLst>
+              <a:gd name="adj" fmla="val 7692"/>
+            </a:avLst>
+          </a:prstGeom>
+          <a:solidFill>
+            <a:srgbClr val="FFFFFF"/>
+          </a:solidFill>
+          <a:ln w="12700">
+            <a:solidFill>
+              <a:srgbClr val="DB2777"/>
+            </a:solidFill>
+            <a:prstDash val="solid"/>
+          </a:ln>
+        </p:spPr>
+      </p:sp>
+      <p:sp>
+        <p:nvSpPr>
+          <p:cNvPr id="55" name="Text 53"/>
+          <p:cNvSpPr/>
+          <p:nvPr/>
+        </p:nvSpPr>
+        <p:spPr>
+          <a:xfrm>
+            <a:off x="7576947" y="4169664"/>
+            <a:ext cx="685800" cy="475488"/>
+          </a:xfrm>
+          <a:prstGeom prst="rect">
+            <a:avLst/>
+          </a:prstGeom>
+          <a:noFill/>
+          <a:ln/>
+        </p:spPr>
+        <p:txBody>
+          <a:bodyPr wrap="square" lIns="0" tIns="0" rIns="0" bIns="0" rtlCol="0" anchor="ctr"/>
+          <a:lstStyle/>
+          <a:p>
+            <a:pPr algn="ctr" indent="0" marL="0">
+              <a:buNone/>
+            </a:pPr>
+            <a:r>
+              <a:rPr lang="en-US" sz="900" b="1" dirty="0">
+                <a:solidFill>
+                  <a:srgbClr val="9D174D"/>
+                </a:solidFill>
+                <a:latin typeface="Trebuchet MS" pitchFamily="34" charset="0"/>
+                <a:ea typeface="Trebuchet MS" pitchFamily="34" charset="-122"/>
+                <a:cs typeface="Trebuchet MS" pitchFamily="34" charset="-120"/>
+              </a:rPr>
+              <a:t>ng</a:t>
             </a:r>
             <a:endParaRPr lang="en-US" sz="900" dirty="0"/>
           </a:p>
@@ -16357,7 +17035,7 @@
                 <a:ea typeface="Calibri" pitchFamily="34" charset="-122"/>
                 <a:cs typeface="Calibri" pitchFamily="34" charset="-120"/>
               </a:rPr>
-              <a:t>Word Labs  •  wordlabs.app  •  Root: 'order' = arrange, sequence, command</a:t>
+              <a:t>Word Labs  •  wordlabs.app  •  Root: 'order' = arrangement, sequence, command</a:t>
             </a:r>
             <a:endParaRPr lang="en-US" sz="800" dirty="0"/>
           </a:p>
@@ -16691,7 +17369,7 @@
                 <a:ea typeface="Trebuchet MS" pitchFamily="34" charset="-122"/>
                 <a:cs typeface="Trebuchet MS" pitchFamily="34" charset="-120"/>
               </a:rPr>
-              <a:t>2</a:t>
+              <a:t>1</a:t>
             </a:r>
             <a:pPr algn="ctr" indent="0" marL="0">
               <a:buNone/>
@@ -16705,7 +17383,7 @@
                 <a:ea typeface="Trebuchet MS" pitchFamily="34" charset="-122"/>
                 <a:cs typeface="Trebuchet MS" pitchFamily="34" charset="-120"/>
               </a:rPr>
-              <a:t>  punctuation marks</a:t>
+              <a:t>  punctuation mark</a:t>
             </a:r>
             <a:endParaRPr lang="en-US" sz="2800" dirty="0"/>
           </a:p>
@@ -16997,7 +17675,7 @@
                 <a:ea typeface="Calibri" pitchFamily="34" charset="-122"/>
                 <a:cs typeface="Calibri" pitchFamily="34" charset="-120"/>
               </a:rPr>
-              <a:t>Word Labs  •  wordlabs.app  •  Root: 'order' = arrange, sequence, command</a:t>
+              <a:t>Word Labs  •  wordlabs.app  •  Root: 'order' = arrangement, sequence, command</a:t>
             </a:r>
             <a:endParaRPr lang="en-US" sz="800" dirty="0"/>
           </a:p>
@@ -17109,7 +17787,7 @@
                 <a:ea typeface="Calibri" pitchFamily="34" charset="-122"/>
                 <a:cs typeface="Calibri" pitchFamily="34" charset="-120"/>
               </a:rPr>
-              <a:t>The </a:t>
+              <a:t>Despite the </a:t>
             </a:r>
             <a:pPr algn="l" indent="0" marL="0">
               <a:buNone/>
@@ -17140,7 +17818,7 @@
                 <a:ea typeface="Calibri" pitchFamily="34" charset="-122"/>
                 <a:cs typeface="Calibri" pitchFamily="34" charset="-120"/>
               </a:rPr>
-              <a:t> in the storeroom meant we had to </a:t>
+              <a:t> in the room, she </a:t>
             </a:r>
             <a:pPr algn="l" indent="0" marL="0">
               <a:buNone/>
@@ -17157,7 +17835,7 @@
                 <a:ea typeface="Calibri" pitchFamily="34" charset="-122"/>
                 <a:cs typeface="Calibri" pitchFamily="34" charset="-120"/>
               </a:rPr>
-              <a:t>reorder</a:t>
+              <a:t>preordered</a:t>
             </a:r>
             <a:pPr algn="l" indent="0" marL="0">
               <a:buNone/>
@@ -17171,7 +17849,7 @@
                 <a:ea typeface="Calibri" pitchFamily="34" charset="-122"/>
                 <a:cs typeface="Calibri" pitchFamily="34" charset="-120"/>
               </a:rPr>
-              <a:t> supplies, but the </a:t>
+              <a:t> the supplies and gave the </a:t>
             </a:r>
             <a:pPr algn="l" indent="0" marL="0">
               <a:buNone/>
@@ -17188,7 +17866,7 @@
                 <a:ea typeface="Calibri" pitchFamily="34" charset="-122"/>
                 <a:cs typeface="Calibri" pitchFamily="34" charset="-120"/>
               </a:rPr>
-              <a:t>orderly</a:t>
+              <a:t>orders</a:t>
             </a:r>
             <a:pPr algn="l" indent="0" marL="0">
               <a:buNone/>
@@ -17202,7 +17880,7 @@
                 <a:ea typeface="Calibri" pitchFamily="34" charset="-122"/>
                 <a:cs typeface="Calibri" pitchFamily="34" charset="-120"/>
               </a:rPr>
-              <a:t> shelves upstairs were fine.</a:t>
+              <a:t> clearly to her team.</a:t>
             </a:r>
             <a:endParaRPr lang="en-US" sz="1800" dirty="0"/>
           </a:p>
@@ -17485,7 +18163,7 @@
                 <a:ea typeface="Trebuchet MS" pitchFamily="34" charset="-122"/>
                 <a:cs typeface="Trebuchet MS" pitchFamily="34" charset="-120"/>
               </a:rPr>
-              <a:t>reorder</a:t>
+              <a:t>preordered</a:t>
             </a:r>
             <a:endParaRPr lang="en-US" sz="1400" dirty="0"/>
           </a:p>
@@ -17613,7 +18291,7 @@
                 <a:ea typeface="Trebuchet MS" pitchFamily="34" charset="-122"/>
                 <a:cs typeface="Trebuchet MS" pitchFamily="34" charset="-120"/>
               </a:rPr>
-              <a:t>orderly</a:t>
+              <a:t>orders</a:t>
             </a:r>
             <a:endParaRPr lang="en-US" sz="1400" dirty="0"/>
           </a:p>
@@ -17944,7 +18622,7 @@
                 <a:ea typeface="Calibri" pitchFamily="34" charset="-122"/>
                 <a:cs typeface="Calibri" pitchFamily="34" charset="-120"/>
               </a:rPr>
-              <a:t>Word Labs  •  wordlabs.app  •  Root: 'order' = arrange, sequence, command</a:t>
+              <a:t>Word Labs  •  wordlabs.app  •  Root: 'order' = arrangement, sequence, command</a:t>
             </a:r>
             <a:endParaRPr lang="en-US" sz="800" dirty="0"/>
           </a:p>
@@ -18771,7 +19449,7 @@
                 <a:ea typeface="Calibri" pitchFamily="34" charset="-122"/>
                 <a:cs typeface="Calibri" pitchFamily="34" charset="-120"/>
               </a:rPr>
-              <a:t>Word Labs  •  wordlabs.app  •  Root: 'order' = arrange, sequence, command</a:t>
+              <a:t>Word Labs  •  wordlabs.app  •  Root: 'order' = arrangement, sequence, command</a:t>
             </a:r>
             <a:endParaRPr lang="en-US" sz="800" dirty="0"/>
           </a:p>
@@ -19200,7 +19878,7 @@
                 <a:ea typeface="Calibri" pitchFamily="34" charset="-122"/>
                 <a:cs typeface="Calibri" pitchFamily="34" charset="-120"/>
               </a:rPr>
-              <a:t>arrange, sequence</a:t>
+              <a:t>arrangement, sequence</a:t>
             </a:r>
             <a:endParaRPr lang="en-US" sz="850" dirty="0"/>
           </a:p>
@@ -19756,7 +20434,7 @@
                 <a:ea typeface="Calibri" pitchFamily="34" charset="-122"/>
                 <a:cs typeface="Calibri" pitchFamily="34" charset="-120"/>
               </a:rPr>
-              <a:t>Word Labs  •  wordlabs.app  •  Root: 'order' = arrange, sequence, command</a:t>
+              <a:t>Word Labs  •  wordlabs.app  •  Root: 'order' = arrangement, sequence, command</a:t>
             </a:r>
             <a:endParaRPr lang="en-US" sz="800" dirty="0"/>
           </a:p>
@@ -20185,7 +20863,7 @@
                 <a:ea typeface="Calibri" pitchFamily="34" charset="-122"/>
                 <a:cs typeface="Calibri" pitchFamily="34" charset="-120"/>
               </a:rPr>
-              <a:t>arrange, sequence</a:t>
+              <a:t>arrangement, sequence</a:t>
             </a:r>
             <a:endParaRPr lang="en-US" sz="850" dirty="0"/>
           </a:p>
@@ -20978,7 +21656,7 @@
                 <a:ea typeface="Calibri" pitchFamily="34" charset="-122"/>
                 <a:cs typeface="Calibri" pitchFamily="34" charset="-120"/>
               </a:rPr>
-              <a:t>Word Labs  •  wordlabs.app  •  Root: 'order' = arrange, sequence, command</a:t>
+              <a:t>Word Labs  •  wordlabs.app  •  Root: 'order' = arrangement, sequence, command</a:t>
             </a:r>
             <a:endParaRPr lang="en-US" sz="800" dirty="0"/>
           </a:p>
@@ -21407,7 +22085,7 @@
                 <a:ea typeface="Calibri" pitchFamily="34" charset="-122"/>
                 <a:cs typeface="Calibri" pitchFamily="34" charset="-120"/>
               </a:rPr>
-              <a:t>arrange, sequence</a:t>
+              <a:t>arrangement, sequence</a:t>
             </a:r>
             <a:endParaRPr lang="en-US" sz="850" dirty="0"/>
           </a:p>
@@ -22557,7 +23235,7 @@
                 <a:ea typeface="Calibri" pitchFamily="34" charset="-122"/>
                 <a:cs typeface="Calibri" pitchFamily="34" charset="-120"/>
               </a:rPr>
-              <a:t>Word Labs  •  wordlabs.app  •  Root: 'order' = arrange, sequence, command</a:t>
+              <a:t>Word Labs  •  wordlabs.app  •  Root: 'order' = arrangement, sequence, command</a:t>
             </a:r>
             <a:endParaRPr lang="en-US" sz="800" dirty="0"/>
           </a:p>
@@ -22696,7 +23374,7 @@
                 <a:ea typeface="Trebuchet MS" pitchFamily="34" charset="-122"/>
                 <a:cs typeface="Trebuchet MS" pitchFamily="34" charset="-120"/>
               </a:rPr>
-              <a:t>reorder</a:t>
+              <a:t>preordered</a:t>
             </a:r>
             <a:endParaRPr lang="en-US" sz="2800" dirty="0"/>
           </a:p>
@@ -23384,7 +24062,7 @@
                 <a:ea typeface="Calibri" pitchFamily="34" charset="-122"/>
                 <a:cs typeface="Calibri" pitchFamily="34" charset="-120"/>
               </a:rPr>
-              <a:t>Word Labs  •  wordlabs.app  •  Root: 'order' = arrange, sequence, command</a:t>
+              <a:t>Word Labs  •  wordlabs.app  •  Root: 'order' = arrangement, sequence, command</a:t>
             </a:r>
             <a:endParaRPr lang="en-US" sz="800" dirty="0"/>
           </a:p>
@@ -23523,7 +24201,7 @@
                 <a:ea typeface="Trebuchet MS" pitchFamily="34" charset="-122"/>
                 <a:cs typeface="Trebuchet MS" pitchFamily="34" charset="-120"/>
               </a:rPr>
-              <a:t>reorder</a:t>
+              <a:t>preordered</a:t>
             </a:r>
             <a:endParaRPr lang="en-US" sz="2800" dirty="0"/>
           </a:p>
@@ -23603,7 +24281,7 @@
         </p:nvSpPr>
         <p:spPr>
           <a:xfrm>
-            <a:off x="2938272" y="2258568"/>
+            <a:off x="2221992" y="2258568"/>
             <a:ext cx="1828800" cy="292608"/>
           </a:xfrm>
           <a:prstGeom prst="rect">
@@ -23637,7 +24315,7 @@
         </p:nvSpPr>
         <p:spPr>
           <a:xfrm>
-            <a:off x="2938272" y="2258568"/>
+            <a:off x="2221992" y="2258568"/>
             <a:ext cx="1828800" cy="292608"/>
           </a:xfrm>
           <a:prstGeom prst="rect">
@@ -23662,7 +24340,7 @@
                 <a:ea typeface="Trebuchet MS" pitchFamily="34" charset="-122"/>
                 <a:cs typeface="Trebuchet MS" pitchFamily="34" charset="-120"/>
               </a:rPr>
-              <a:t>re</a:t>
+              <a:t>pre</a:t>
             </a:r>
             <a:endParaRPr lang="en-US" sz="1300" dirty="0"/>
           </a:p>
@@ -23676,7 +24354,7 @@
         </p:nvSpPr>
         <p:spPr>
           <a:xfrm>
-            <a:off x="2938272" y="2569464"/>
+            <a:off x="2221992" y="2569464"/>
             <a:ext cx="1828800" cy="201168"/>
           </a:xfrm>
           <a:prstGeom prst="rect">
@@ -23701,7 +24379,7 @@
                 <a:ea typeface="Calibri" pitchFamily="34" charset="-122"/>
                 <a:cs typeface="Calibri" pitchFamily="34" charset="-120"/>
               </a:rPr>
-              <a:t>again</a:t>
+              <a:t>before</a:t>
             </a:r>
             <a:endParaRPr lang="en-US" sz="850" dirty="0"/>
           </a:p>
@@ -23715,7 +24393,7 @@
         </p:nvSpPr>
         <p:spPr>
           <a:xfrm>
-            <a:off x="5803392" y="2258568"/>
+            <a:off x="4370832" y="2258568"/>
             <a:ext cx="1828800" cy="292608"/>
           </a:xfrm>
           <a:prstGeom prst="rect">
@@ -23749,7 +24427,7 @@
         </p:nvSpPr>
         <p:spPr>
           <a:xfrm>
-            <a:off x="5803392" y="2258568"/>
+            <a:off x="4370832" y="2258568"/>
             <a:ext cx="1828800" cy="292608"/>
           </a:xfrm>
           <a:prstGeom prst="rect">
@@ -23788,7 +24466,7 @@
         </p:nvSpPr>
         <p:spPr>
           <a:xfrm>
-            <a:off x="5803392" y="2569464"/>
+            <a:off x="4370832" y="2569464"/>
             <a:ext cx="1828800" cy="201168"/>
           </a:xfrm>
           <a:prstGeom prst="rect">
@@ -23813,7 +24491,7 @@
                 <a:ea typeface="Calibri" pitchFamily="34" charset="-122"/>
                 <a:cs typeface="Calibri" pitchFamily="34" charset="-120"/>
               </a:rPr>
-              <a:t>arrange, sequence</a:t>
+              <a:t>arrangement, sequence</a:t>
             </a:r>
             <a:endParaRPr lang="en-US" sz="850" dirty="0"/>
           </a:p>
@@ -23822,6 +24500,118 @@
       <p:sp>
         <p:nvSpPr>
           <p:cNvPr id="22" name="Shape 20"/>
+          <p:cNvSpPr/>
+          <p:nvPr/>
+        </p:nvSpPr>
+        <p:spPr>
+          <a:xfrm>
+            <a:off x="6519672" y="2258568"/>
+            <a:ext cx="1828800" cy="292608"/>
+          </a:xfrm>
+          <a:prstGeom prst="rect">
+            <a:avLst>
+              <a:gd name="adj" fmla="val 25000"/>
+            </a:avLst>
+          </a:prstGeom>
+          <a:solidFill>
+            <a:srgbClr val="FCE7F3"/>
+          </a:solidFill>
+          <a:ln w="19050">
+            <a:solidFill>
+              <a:srgbClr val="DB2777"/>
+            </a:solidFill>
+            <a:prstDash val="solid"/>
+          </a:ln>
+          <a:effectLst>
+            <a:outerShdw sx="100000" sy="100000" kx="0" ky="0" algn="bl" rotWithShape="0" blurRad="101600" dist="38100" dir="8100000">
+              <a:srgbClr val="000000">
+                <a:alpha val="12000"/>
+              </a:srgbClr>
+            </a:outerShdw>
+          </a:effectLst>
+        </p:spPr>
+      </p:sp>
+      <p:sp>
+        <p:nvSpPr>
+          <p:cNvPr id="23" name="Text 21"/>
+          <p:cNvSpPr/>
+          <p:nvPr/>
+        </p:nvSpPr>
+        <p:spPr>
+          <a:xfrm>
+            <a:off x="6519672" y="2258568"/>
+            <a:ext cx="1828800" cy="292608"/>
+          </a:xfrm>
+          <a:prstGeom prst="rect">
+            <a:avLst/>
+          </a:prstGeom>
+          <a:noFill/>
+          <a:ln/>
+        </p:spPr>
+        <p:txBody>
+          <a:bodyPr wrap="square" lIns="0" tIns="0" rIns="0" bIns="0" rtlCol="0" anchor="ctr"/>
+          <a:lstStyle/>
+          <a:p>
+            <a:pPr algn="ctr" indent="0" marL="0">
+              <a:buNone/>
+            </a:pPr>
+            <a:r>
+              <a:rPr lang="en-US" sz="1300" b="1" dirty="0">
+                <a:solidFill>
+                  <a:srgbClr val="9D174D"/>
+                </a:solidFill>
+                <a:latin typeface="Trebuchet MS" pitchFamily="34" charset="0"/>
+                <a:ea typeface="Trebuchet MS" pitchFamily="34" charset="-122"/>
+                <a:cs typeface="Trebuchet MS" pitchFamily="34" charset="-120"/>
+              </a:rPr>
+              <a:t>ed</a:t>
+            </a:r>
+            <a:endParaRPr lang="en-US" sz="1300" dirty="0"/>
+          </a:p>
+        </p:txBody>
+      </p:sp>
+      <p:sp>
+        <p:nvSpPr>
+          <p:cNvPr id="24" name="Text 22"/>
+          <p:cNvSpPr/>
+          <p:nvPr/>
+        </p:nvSpPr>
+        <p:spPr>
+          <a:xfrm>
+            <a:off x="6519672" y="2569464"/>
+            <a:ext cx="1828800" cy="201168"/>
+          </a:xfrm>
+          <a:prstGeom prst="rect">
+            <a:avLst/>
+          </a:prstGeom>
+          <a:noFill/>
+          <a:ln/>
+        </p:spPr>
+        <p:txBody>
+          <a:bodyPr wrap="square" lIns="0" tIns="0" rIns="0" bIns="0" rtlCol="0" anchor="t"/>
+          <a:lstStyle/>
+          <a:p>
+            <a:pPr algn="ctr" indent="0" marL="0">
+              <a:buNone/>
+            </a:pPr>
+            <a:r>
+              <a:rPr lang="en-US" sz="850" dirty="0">
+                <a:solidFill>
+                  <a:srgbClr val="475569"/>
+                </a:solidFill>
+                <a:latin typeface="Calibri" pitchFamily="34" charset="0"/>
+                <a:ea typeface="Calibri" pitchFamily="34" charset="-122"/>
+                <a:cs typeface="Calibri" pitchFamily="34" charset="-120"/>
+              </a:rPr>
+              <a:t>past tense</a:t>
+            </a:r>
+            <a:endParaRPr lang="en-US" sz="850" dirty="0"/>
+          </a:p>
+        </p:txBody>
+      </p:sp>
+      <p:sp>
+        <p:nvSpPr>
+          <p:cNvPr id="25" name="Shape 23"/>
           <p:cNvSpPr/>
           <p:nvPr/>
         </p:nvSpPr>
@@ -23848,7 +24638,7 @@
       </p:sp>
       <p:sp>
         <p:nvSpPr>
-          <p:cNvPr id="23" name="Text 21"/>
+          <p:cNvPr id="26" name="Text 24"/>
           <p:cNvSpPr/>
           <p:nvPr/>
         </p:nvSpPr>
@@ -23887,7 +24677,7 @@
       </p:sp>
       <p:sp>
         <p:nvSpPr>
-          <p:cNvPr id="24" name="Shape 22"/>
+          <p:cNvPr id="27" name="Shape 25"/>
           <p:cNvSpPr/>
           <p:nvPr/>
         </p:nvSpPr>
@@ -23914,7 +24704,7 @@
       </p:sp>
       <p:sp>
         <p:nvSpPr>
-          <p:cNvPr id="25" name="Text 23"/>
+          <p:cNvPr id="28" name="Text 26"/>
           <p:cNvSpPr/>
           <p:nvPr/>
         </p:nvSpPr>
@@ -23953,7 +24743,7 @@
       </p:sp>
       <p:sp>
         <p:nvSpPr>
-          <p:cNvPr id="26" name="Shape 24"/>
+          <p:cNvPr id="29" name="Shape 27"/>
           <p:cNvSpPr/>
           <p:nvPr/>
         </p:nvSpPr>
@@ -23980,7 +24770,7 @@
       </p:sp>
       <p:sp>
         <p:nvSpPr>
-          <p:cNvPr id="27" name="Text 25"/>
+          <p:cNvPr id="30" name="Text 28"/>
           <p:cNvSpPr/>
           <p:nvPr/>
         </p:nvSpPr>
@@ -24019,7 +24809,7 @@
       </p:sp>
       <p:sp>
         <p:nvSpPr>
-          <p:cNvPr id="28" name="Shape 26"/>
+          <p:cNvPr id="31" name="Shape 29"/>
           <p:cNvSpPr/>
           <p:nvPr/>
         </p:nvSpPr>
@@ -24046,7 +24836,7 @@
       </p:sp>
       <p:sp>
         <p:nvSpPr>
-          <p:cNvPr id="29" name="Text 27"/>
+          <p:cNvPr id="32" name="Text 30"/>
           <p:cNvSpPr/>
           <p:nvPr/>
         </p:nvSpPr>
@@ -24369,7 +25159,7 @@
                 <a:ea typeface="Calibri" pitchFamily="34" charset="-122"/>
                 <a:cs typeface="Calibri" pitchFamily="34" charset="-120"/>
               </a:rPr>
-              <a:t>Word Labs  •  wordlabs.app  •  Root: 'order' = arrange, sequence, command</a:t>
+              <a:t>Word Labs  •  wordlabs.app  •  Root: 'order' = arrangement, sequence, command</a:t>
             </a:r>
             <a:endParaRPr lang="en-US" sz="800" dirty="0"/>
           </a:p>
@@ -24442,7 +25232,7 @@
                 <a:ea typeface="Trebuchet MS" pitchFamily="34" charset="-122"/>
                 <a:cs typeface="Trebuchet MS" pitchFamily="34" charset="-120"/>
               </a:rPr>
-              <a:t>We are learning that the root 'order' means 'arrange, sequence, command'.</a:t>
+              <a:t>We are learning that the root 'order' means 'arrangement, sequence, command'.</a:t>
             </a:r>
             <a:endParaRPr lang="en-US" sz="2000" dirty="0"/>
           </a:p>
@@ -25088,7 +25878,7 @@
                 <a:ea typeface="Calibri" pitchFamily="34" charset="-122"/>
                 <a:cs typeface="Calibri" pitchFamily="34" charset="-120"/>
               </a:rPr>
-              <a:t>Word Labs  •  wordlabs.app  •  Root: 'order' = arrange, sequence, command</a:t>
+              <a:t>Word Labs  •  wordlabs.app  •  Root: 'order' = arrangement, sequence, command</a:t>
             </a:r>
             <a:endParaRPr lang="en-US" sz="800" dirty="0"/>
           </a:p>
@@ -25227,7 +26017,7 @@
                 <a:ea typeface="Trebuchet MS" pitchFamily="34" charset="-122"/>
                 <a:cs typeface="Trebuchet MS" pitchFamily="34" charset="-120"/>
               </a:rPr>
-              <a:t>reorder</a:t>
+              <a:t>preordered</a:t>
             </a:r>
             <a:endParaRPr lang="en-US" sz="2800" dirty="0"/>
           </a:p>
@@ -25307,7 +26097,7 @@
         </p:nvSpPr>
         <p:spPr>
           <a:xfrm>
-            <a:off x="2938272" y="2258568"/>
+            <a:off x="2221992" y="2258568"/>
             <a:ext cx="1828800" cy="292608"/>
           </a:xfrm>
           <a:prstGeom prst="rect">
@@ -25341,7 +26131,7 @@
         </p:nvSpPr>
         <p:spPr>
           <a:xfrm>
-            <a:off x="2938272" y="2258568"/>
+            <a:off x="2221992" y="2258568"/>
             <a:ext cx="1828800" cy="292608"/>
           </a:xfrm>
           <a:prstGeom prst="rect">
@@ -25366,7 +26156,7 @@
                 <a:ea typeface="Trebuchet MS" pitchFamily="34" charset="-122"/>
                 <a:cs typeface="Trebuchet MS" pitchFamily="34" charset="-120"/>
               </a:rPr>
-              <a:t>re</a:t>
+              <a:t>pre</a:t>
             </a:r>
             <a:endParaRPr lang="en-US" sz="1300" dirty="0"/>
           </a:p>
@@ -25380,7 +26170,7 @@
         </p:nvSpPr>
         <p:spPr>
           <a:xfrm>
-            <a:off x="2938272" y="2569464"/>
+            <a:off x="2221992" y="2569464"/>
             <a:ext cx="1828800" cy="201168"/>
           </a:xfrm>
           <a:prstGeom prst="rect">
@@ -25405,7 +26195,7 @@
                 <a:ea typeface="Calibri" pitchFamily="34" charset="-122"/>
                 <a:cs typeface="Calibri" pitchFamily="34" charset="-120"/>
               </a:rPr>
-              <a:t>again</a:t>
+              <a:t>before</a:t>
             </a:r>
             <a:endParaRPr lang="en-US" sz="850" dirty="0"/>
           </a:p>
@@ -25419,7 +26209,7 @@
         </p:nvSpPr>
         <p:spPr>
           <a:xfrm>
-            <a:off x="5803392" y="2258568"/>
+            <a:off x="4370832" y="2258568"/>
             <a:ext cx="1828800" cy="292608"/>
           </a:xfrm>
           <a:prstGeom prst="rect">
@@ -25453,7 +26243,7 @@
         </p:nvSpPr>
         <p:spPr>
           <a:xfrm>
-            <a:off x="5803392" y="2258568"/>
+            <a:off x="4370832" y="2258568"/>
             <a:ext cx="1828800" cy="292608"/>
           </a:xfrm>
           <a:prstGeom prst="rect">
@@ -25492,7 +26282,7 @@
         </p:nvSpPr>
         <p:spPr>
           <a:xfrm>
-            <a:off x="5803392" y="2569464"/>
+            <a:off x="4370832" y="2569464"/>
             <a:ext cx="1828800" cy="201168"/>
           </a:xfrm>
           <a:prstGeom prst="rect">
@@ -25517,7 +26307,7 @@
                 <a:ea typeface="Calibri" pitchFamily="34" charset="-122"/>
                 <a:cs typeface="Calibri" pitchFamily="34" charset="-120"/>
               </a:rPr>
-              <a:t>arrange, sequence</a:t>
+              <a:t>arrangement, sequence</a:t>
             </a:r>
             <a:endParaRPr lang="en-US" sz="850" dirty="0"/>
           </a:p>
@@ -25526,6 +26316,118 @@
       <p:sp>
         <p:nvSpPr>
           <p:cNvPr id="22" name="Shape 20"/>
+          <p:cNvSpPr/>
+          <p:nvPr/>
+        </p:nvSpPr>
+        <p:spPr>
+          <a:xfrm>
+            <a:off x="6519672" y="2258568"/>
+            <a:ext cx="1828800" cy="292608"/>
+          </a:xfrm>
+          <a:prstGeom prst="rect">
+            <a:avLst>
+              <a:gd name="adj" fmla="val 25000"/>
+            </a:avLst>
+          </a:prstGeom>
+          <a:solidFill>
+            <a:srgbClr val="FCE7F3"/>
+          </a:solidFill>
+          <a:ln w="19050">
+            <a:solidFill>
+              <a:srgbClr val="DB2777"/>
+            </a:solidFill>
+            <a:prstDash val="solid"/>
+          </a:ln>
+          <a:effectLst>
+            <a:outerShdw sx="100000" sy="100000" kx="0" ky="0" algn="bl" rotWithShape="0" blurRad="101600" dist="38100" dir="8100000">
+              <a:srgbClr val="000000">
+                <a:alpha val="12000"/>
+              </a:srgbClr>
+            </a:outerShdw>
+          </a:effectLst>
+        </p:spPr>
+      </p:sp>
+      <p:sp>
+        <p:nvSpPr>
+          <p:cNvPr id="23" name="Text 21"/>
+          <p:cNvSpPr/>
+          <p:nvPr/>
+        </p:nvSpPr>
+        <p:spPr>
+          <a:xfrm>
+            <a:off x="6519672" y="2258568"/>
+            <a:ext cx="1828800" cy="292608"/>
+          </a:xfrm>
+          <a:prstGeom prst="rect">
+            <a:avLst/>
+          </a:prstGeom>
+          <a:noFill/>
+          <a:ln/>
+        </p:spPr>
+        <p:txBody>
+          <a:bodyPr wrap="square" lIns="0" tIns="0" rIns="0" bIns="0" rtlCol="0" anchor="ctr"/>
+          <a:lstStyle/>
+          <a:p>
+            <a:pPr algn="ctr" indent="0" marL="0">
+              <a:buNone/>
+            </a:pPr>
+            <a:r>
+              <a:rPr lang="en-US" sz="1300" b="1" dirty="0">
+                <a:solidFill>
+                  <a:srgbClr val="9D174D"/>
+                </a:solidFill>
+                <a:latin typeface="Trebuchet MS" pitchFamily="34" charset="0"/>
+                <a:ea typeface="Trebuchet MS" pitchFamily="34" charset="-122"/>
+                <a:cs typeface="Trebuchet MS" pitchFamily="34" charset="-120"/>
+              </a:rPr>
+              <a:t>ed</a:t>
+            </a:r>
+            <a:endParaRPr lang="en-US" sz="1300" dirty="0"/>
+          </a:p>
+        </p:txBody>
+      </p:sp>
+      <p:sp>
+        <p:nvSpPr>
+          <p:cNvPr id="24" name="Text 22"/>
+          <p:cNvSpPr/>
+          <p:nvPr/>
+        </p:nvSpPr>
+        <p:spPr>
+          <a:xfrm>
+            <a:off x="6519672" y="2569464"/>
+            <a:ext cx="1828800" cy="201168"/>
+          </a:xfrm>
+          <a:prstGeom prst="rect">
+            <a:avLst/>
+          </a:prstGeom>
+          <a:noFill/>
+          <a:ln/>
+        </p:spPr>
+        <p:txBody>
+          <a:bodyPr wrap="square" lIns="0" tIns="0" rIns="0" bIns="0" rtlCol="0" anchor="t"/>
+          <a:lstStyle/>
+          <a:p>
+            <a:pPr algn="ctr" indent="0" marL="0">
+              <a:buNone/>
+            </a:pPr>
+            <a:r>
+              <a:rPr lang="en-US" sz="850" dirty="0">
+                <a:solidFill>
+                  <a:srgbClr val="475569"/>
+                </a:solidFill>
+                <a:latin typeface="Calibri" pitchFamily="34" charset="0"/>
+                <a:ea typeface="Calibri" pitchFamily="34" charset="-122"/>
+                <a:cs typeface="Calibri" pitchFamily="34" charset="-120"/>
+              </a:rPr>
+              <a:t>past tense</a:t>
+            </a:r>
+            <a:endParaRPr lang="en-US" sz="850" dirty="0"/>
+          </a:p>
+        </p:txBody>
+      </p:sp>
+      <p:sp>
+        <p:nvSpPr>
+          <p:cNvPr id="25" name="Shape 23"/>
           <p:cNvSpPr/>
           <p:nvPr/>
         </p:nvSpPr>
@@ -25552,7 +26454,7 @@
       </p:sp>
       <p:sp>
         <p:nvSpPr>
-          <p:cNvPr id="23" name="Text 21"/>
+          <p:cNvPr id="26" name="Text 24"/>
           <p:cNvSpPr/>
           <p:nvPr/>
         </p:nvSpPr>
@@ -25591,7 +26493,7 @@
       </p:sp>
       <p:sp>
         <p:nvSpPr>
-          <p:cNvPr id="24" name="Shape 22"/>
+          <p:cNvPr id="27" name="Shape 25"/>
           <p:cNvSpPr/>
           <p:nvPr/>
         </p:nvSpPr>
@@ -25618,7 +26520,7 @@
       </p:sp>
       <p:sp>
         <p:nvSpPr>
-          <p:cNvPr id="25" name="Shape 23"/>
+          <p:cNvPr id="28" name="Shape 26"/>
           <p:cNvSpPr/>
           <p:nvPr/>
         </p:nvSpPr>
@@ -25645,7 +26547,7 @@
       </p:sp>
       <p:sp>
         <p:nvSpPr>
-          <p:cNvPr id="26" name="Text 24"/>
+          <p:cNvPr id="29" name="Text 27"/>
           <p:cNvSpPr/>
           <p:nvPr/>
         </p:nvSpPr>
@@ -25676,7 +26578,7 @@
                 <a:ea typeface="Trebuchet MS" pitchFamily="34" charset="-122"/>
                 <a:cs typeface="Trebuchet MS" pitchFamily="34" charset="-120"/>
               </a:rPr>
-              <a:t>re</a:t>
+              <a:t>pre</a:t>
             </a:r>
             <a:endParaRPr lang="en-US" sz="1400" dirty="0"/>
           </a:p>
@@ -25684,7 +26586,7 @@
       </p:sp>
       <p:sp>
         <p:nvSpPr>
-          <p:cNvPr id="27" name="Text 25"/>
+          <p:cNvPr id="30" name="Text 28"/>
           <p:cNvSpPr/>
           <p:nvPr/>
         </p:nvSpPr>
@@ -25723,7 +26625,7 @@
       </p:sp>
       <p:sp>
         <p:nvSpPr>
-          <p:cNvPr id="28" name="Shape 26"/>
+          <p:cNvPr id="31" name="Shape 29"/>
           <p:cNvSpPr/>
           <p:nvPr/>
         </p:nvSpPr>
@@ -25750,7 +26652,7 @@
       </p:sp>
       <p:sp>
         <p:nvSpPr>
-          <p:cNvPr id="29" name="Text 27"/>
+          <p:cNvPr id="32" name="Text 30"/>
           <p:cNvSpPr/>
           <p:nvPr/>
         </p:nvSpPr>
@@ -25789,7 +26691,7 @@
       </p:sp>
       <p:sp>
         <p:nvSpPr>
-          <p:cNvPr id="30" name="Text 28"/>
+          <p:cNvPr id="33" name="Text 31"/>
           <p:cNvSpPr/>
           <p:nvPr/>
         </p:nvSpPr>
@@ -25828,7 +26730,7 @@
       </p:sp>
       <p:sp>
         <p:nvSpPr>
-          <p:cNvPr id="31" name="Shape 29"/>
+          <p:cNvPr id="34" name="Shape 32"/>
           <p:cNvSpPr/>
           <p:nvPr/>
         </p:nvSpPr>
@@ -25855,7 +26757,7 @@
       </p:sp>
       <p:sp>
         <p:nvSpPr>
-          <p:cNvPr id="32" name="Text 30"/>
+          <p:cNvPr id="35" name="Text 33"/>
           <p:cNvSpPr/>
           <p:nvPr/>
         </p:nvSpPr>
@@ -25886,7 +26788,7 @@
                 <a:ea typeface="Trebuchet MS" pitchFamily="34" charset="-122"/>
                 <a:cs typeface="Trebuchet MS" pitchFamily="34" charset="-120"/>
               </a:rPr>
-              <a:t>der</a:t>
+              <a:t>dered</a:t>
             </a:r>
             <a:endParaRPr lang="en-US" sz="1400" dirty="0"/>
           </a:p>
@@ -25894,7 +26796,7 @@
       </p:sp>
       <p:sp>
         <p:nvSpPr>
-          <p:cNvPr id="33" name="Shape 31"/>
+          <p:cNvPr id="36" name="Shape 34"/>
           <p:cNvSpPr/>
           <p:nvPr/>
         </p:nvSpPr>
@@ -25921,7 +26823,7 @@
       </p:sp>
       <p:sp>
         <p:nvSpPr>
-          <p:cNvPr id="34" name="Text 32"/>
+          <p:cNvPr id="37" name="Text 35"/>
           <p:cNvSpPr/>
           <p:nvPr/>
         </p:nvSpPr>
@@ -25960,7 +26862,7 @@
       </p:sp>
       <p:sp>
         <p:nvSpPr>
-          <p:cNvPr id="35" name="Shape 33"/>
+          <p:cNvPr id="38" name="Shape 36"/>
           <p:cNvSpPr/>
           <p:nvPr/>
         </p:nvSpPr>
@@ -25987,7 +26889,7 @@
       </p:sp>
       <p:sp>
         <p:nvSpPr>
-          <p:cNvPr id="36" name="Text 34"/>
+          <p:cNvPr id="39" name="Text 37"/>
           <p:cNvSpPr/>
           <p:nvPr/>
         </p:nvSpPr>
@@ -26310,7 +27212,7 @@
                 <a:ea typeface="Calibri" pitchFamily="34" charset="-122"/>
                 <a:cs typeface="Calibri" pitchFamily="34" charset="-120"/>
               </a:rPr>
-              <a:t>Word Labs  •  wordlabs.app  •  Root: 'order' = arrange, sequence, command</a:t>
+              <a:t>Word Labs  •  wordlabs.app  •  Root: 'order' = arrangement, sequence, command</a:t>
             </a:r>
             <a:endParaRPr lang="en-US" sz="800" dirty="0"/>
           </a:p>
@@ -26449,7 +27351,7 @@
                 <a:ea typeface="Trebuchet MS" pitchFamily="34" charset="-122"/>
                 <a:cs typeface="Trebuchet MS" pitchFamily="34" charset="-120"/>
               </a:rPr>
-              <a:t>reorder</a:t>
+              <a:t>preordered</a:t>
             </a:r>
             <a:endParaRPr lang="en-US" sz="2800" dirty="0"/>
           </a:p>
@@ -26529,7 +27431,7 @@
         </p:nvSpPr>
         <p:spPr>
           <a:xfrm>
-            <a:off x="2938272" y="2258568"/>
+            <a:off x="2221992" y="2258568"/>
             <a:ext cx="1828800" cy="292608"/>
           </a:xfrm>
           <a:prstGeom prst="rect">
@@ -26563,7 +27465,7 @@
         </p:nvSpPr>
         <p:spPr>
           <a:xfrm>
-            <a:off x="2938272" y="2258568"/>
+            <a:off x="2221992" y="2258568"/>
             <a:ext cx="1828800" cy="292608"/>
           </a:xfrm>
           <a:prstGeom prst="rect">
@@ -26588,7 +27490,7 @@
                 <a:ea typeface="Trebuchet MS" pitchFamily="34" charset="-122"/>
                 <a:cs typeface="Trebuchet MS" pitchFamily="34" charset="-120"/>
               </a:rPr>
-              <a:t>re</a:t>
+              <a:t>pre</a:t>
             </a:r>
             <a:endParaRPr lang="en-US" sz="1300" dirty="0"/>
           </a:p>
@@ -26602,7 +27504,7 @@
         </p:nvSpPr>
         <p:spPr>
           <a:xfrm>
-            <a:off x="2938272" y="2569464"/>
+            <a:off x="2221992" y="2569464"/>
             <a:ext cx="1828800" cy="201168"/>
           </a:xfrm>
           <a:prstGeom prst="rect">
@@ -26627,7 +27529,7 @@
                 <a:ea typeface="Calibri" pitchFamily="34" charset="-122"/>
                 <a:cs typeface="Calibri" pitchFamily="34" charset="-120"/>
               </a:rPr>
-              <a:t>again</a:t>
+              <a:t>before</a:t>
             </a:r>
             <a:endParaRPr lang="en-US" sz="850" dirty="0"/>
           </a:p>
@@ -26641,7 +27543,7 @@
         </p:nvSpPr>
         <p:spPr>
           <a:xfrm>
-            <a:off x="5803392" y="2258568"/>
+            <a:off x="4370832" y="2258568"/>
             <a:ext cx="1828800" cy="292608"/>
           </a:xfrm>
           <a:prstGeom prst="rect">
@@ -26675,7 +27577,7 @@
         </p:nvSpPr>
         <p:spPr>
           <a:xfrm>
-            <a:off x="5803392" y="2258568"/>
+            <a:off x="4370832" y="2258568"/>
             <a:ext cx="1828800" cy="292608"/>
           </a:xfrm>
           <a:prstGeom prst="rect">
@@ -26714,7 +27616,7 @@
         </p:nvSpPr>
         <p:spPr>
           <a:xfrm>
-            <a:off x="5803392" y="2569464"/>
+            <a:off x="4370832" y="2569464"/>
             <a:ext cx="1828800" cy="201168"/>
           </a:xfrm>
           <a:prstGeom prst="rect">
@@ -26739,7 +27641,7 @@
                 <a:ea typeface="Calibri" pitchFamily="34" charset="-122"/>
                 <a:cs typeface="Calibri" pitchFamily="34" charset="-120"/>
               </a:rPr>
-              <a:t>arrange, sequence</a:t>
+              <a:t>arrangement, sequence</a:t>
             </a:r>
             <a:endParaRPr lang="en-US" sz="850" dirty="0"/>
           </a:p>
@@ -26748,6 +27650,118 @@
       <p:sp>
         <p:nvSpPr>
           <p:cNvPr id="22" name="Shape 20"/>
+          <p:cNvSpPr/>
+          <p:nvPr/>
+        </p:nvSpPr>
+        <p:spPr>
+          <a:xfrm>
+            <a:off x="6519672" y="2258568"/>
+            <a:ext cx="1828800" cy="292608"/>
+          </a:xfrm>
+          <a:prstGeom prst="rect">
+            <a:avLst>
+              <a:gd name="adj" fmla="val 25000"/>
+            </a:avLst>
+          </a:prstGeom>
+          <a:solidFill>
+            <a:srgbClr val="FCE7F3"/>
+          </a:solidFill>
+          <a:ln w="19050">
+            <a:solidFill>
+              <a:srgbClr val="DB2777"/>
+            </a:solidFill>
+            <a:prstDash val="solid"/>
+          </a:ln>
+          <a:effectLst>
+            <a:outerShdw sx="100000" sy="100000" kx="0" ky="0" algn="bl" rotWithShape="0" blurRad="101600" dist="38100" dir="8100000">
+              <a:srgbClr val="000000">
+                <a:alpha val="12000"/>
+              </a:srgbClr>
+            </a:outerShdw>
+          </a:effectLst>
+        </p:spPr>
+      </p:sp>
+      <p:sp>
+        <p:nvSpPr>
+          <p:cNvPr id="23" name="Text 21"/>
+          <p:cNvSpPr/>
+          <p:nvPr/>
+        </p:nvSpPr>
+        <p:spPr>
+          <a:xfrm>
+            <a:off x="6519672" y="2258568"/>
+            <a:ext cx="1828800" cy="292608"/>
+          </a:xfrm>
+          <a:prstGeom prst="rect">
+            <a:avLst/>
+          </a:prstGeom>
+          <a:noFill/>
+          <a:ln/>
+        </p:spPr>
+        <p:txBody>
+          <a:bodyPr wrap="square" lIns="0" tIns="0" rIns="0" bIns="0" rtlCol="0" anchor="ctr"/>
+          <a:lstStyle/>
+          <a:p>
+            <a:pPr algn="ctr" indent="0" marL="0">
+              <a:buNone/>
+            </a:pPr>
+            <a:r>
+              <a:rPr lang="en-US" sz="1300" b="1" dirty="0">
+                <a:solidFill>
+                  <a:srgbClr val="9D174D"/>
+                </a:solidFill>
+                <a:latin typeface="Trebuchet MS" pitchFamily="34" charset="0"/>
+                <a:ea typeface="Trebuchet MS" pitchFamily="34" charset="-122"/>
+                <a:cs typeface="Trebuchet MS" pitchFamily="34" charset="-120"/>
+              </a:rPr>
+              <a:t>ed</a:t>
+            </a:r>
+            <a:endParaRPr lang="en-US" sz="1300" dirty="0"/>
+          </a:p>
+        </p:txBody>
+      </p:sp>
+      <p:sp>
+        <p:nvSpPr>
+          <p:cNvPr id="24" name="Text 22"/>
+          <p:cNvSpPr/>
+          <p:nvPr/>
+        </p:nvSpPr>
+        <p:spPr>
+          <a:xfrm>
+            <a:off x="6519672" y="2569464"/>
+            <a:ext cx="1828800" cy="201168"/>
+          </a:xfrm>
+          <a:prstGeom prst="rect">
+            <a:avLst/>
+          </a:prstGeom>
+          <a:noFill/>
+          <a:ln/>
+        </p:spPr>
+        <p:txBody>
+          <a:bodyPr wrap="square" lIns="0" tIns="0" rIns="0" bIns="0" rtlCol="0" anchor="t"/>
+          <a:lstStyle/>
+          <a:p>
+            <a:pPr algn="ctr" indent="0" marL="0">
+              <a:buNone/>
+            </a:pPr>
+            <a:r>
+              <a:rPr lang="en-US" sz="850" dirty="0">
+                <a:solidFill>
+                  <a:srgbClr val="475569"/>
+                </a:solidFill>
+                <a:latin typeface="Calibri" pitchFamily="34" charset="0"/>
+                <a:ea typeface="Calibri" pitchFamily="34" charset="-122"/>
+                <a:cs typeface="Calibri" pitchFamily="34" charset="-120"/>
+              </a:rPr>
+              <a:t>past tense</a:t>
+            </a:r>
+            <a:endParaRPr lang="en-US" sz="850" dirty="0"/>
+          </a:p>
+        </p:txBody>
+      </p:sp>
+      <p:sp>
+        <p:nvSpPr>
+          <p:cNvPr id="25" name="Shape 23"/>
           <p:cNvSpPr/>
           <p:nvPr/>
         </p:nvSpPr>
@@ -26774,7 +27788,7 @@
       </p:sp>
       <p:sp>
         <p:nvSpPr>
-          <p:cNvPr id="23" name="Text 21"/>
+          <p:cNvPr id="26" name="Text 24"/>
           <p:cNvSpPr/>
           <p:nvPr/>
         </p:nvSpPr>
@@ -26813,7 +27827,7 @@
       </p:sp>
       <p:sp>
         <p:nvSpPr>
-          <p:cNvPr id="24" name="Shape 22"/>
+          <p:cNvPr id="27" name="Shape 25"/>
           <p:cNvSpPr/>
           <p:nvPr/>
         </p:nvSpPr>
@@ -26840,7 +27854,7 @@
       </p:sp>
       <p:sp>
         <p:nvSpPr>
-          <p:cNvPr id="25" name="Shape 23"/>
+          <p:cNvPr id="28" name="Shape 26"/>
           <p:cNvSpPr/>
           <p:nvPr/>
         </p:nvSpPr>
@@ -26867,7 +27881,7 @@
       </p:sp>
       <p:sp>
         <p:nvSpPr>
-          <p:cNvPr id="26" name="Text 24"/>
+          <p:cNvPr id="29" name="Text 27"/>
           <p:cNvSpPr/>
           <p:nvPr/>
         </p:nvSpPr>
@@ -26898,7 +27912,7 @@
                 <a:ea typeface="Trebuchet MS" pitchFamily="34" charset="-122"/>
                 <a:cs typeface="Trebuchet MS" pitchFamily="34" charset="-120"/>
               </a:rPr>
-              <a:t>re</a:t>
+              <a:t>pre</a:t>
             </a:r>
             <a:endParaRPr lang="en-US" sz="1400" dirty="0"/>
           </a:p>
@@ -26906,7 +27920,7 @@
       </p:sp>
       <p:sp>
         <p:nvSpPr>
-          <p:cNvPr id="27" name="Text 25"/>
+          <p:cNvPr id="30" name="Text 28"/>
           <p:cNvSpPr/>
           <p:nvPr/>
         </p:nvSpPr>
@@ -26945,7 +27959,7 @@
       </p:sp>
       <p:sp>
         <p:nvSpPr>
-          <p:cNvPr id="28" name="Shape 26"/>
+          <p:cNvPr id="31" name="Shape 29"/>
           <p:cNvSpPr/>
           <p:nvPr/>
         </p:nvSpPr>
@@ -26972,7 +27986,7 @@
       </p:sp>
       <p:sp>
         <p:nvSpPr>
-          <p:cNvPr id="29" name="Text 27"/>
+          <p:cNvPr id="32" name="Text 30"/>
           <p:cNvSpPr/>
           <p:nvPr/>
         </p:nvSpPr>
@@ -27011,7 +28025,7 @@
       </p:sp>
       <p:sp>
         <p:nvSpPr>
-          <p:cNvPr id="30" name="Text 28"/>
+          <p:cNvPr id="33" name="Text 31"/>
           <p:cNvSpPr/>
           <p:nvPr/>
         </p:nvSpPr>
@@ -27050,7 +28064,7 @@
       </p:sp>
       <p:sp>
         <p:nvSpPr>
-          <p:cNvPr id="31" name="Shape 29"/>
+          <p:cNvPr id="34" name="Shape 32"/>
           <p:cNvSpPr/>
           <p:nvPr/>
         </p:nvSpPr>
@@ -27077,7 +28091,7 @@
       </p:sp>
       <p:sp>
         <p:nvSpPr>
-          <p:cNvPr id="32" name="Text 30"/>
+          <p:cNvPr id="35" name="Text 33"/>
           <p:cNvSpPr/>
           <p:nvPr/>
         </p:nvSpPr>
@@ -27108,7 +28122,7 @@
                 <a:ea typeface="Trebuchet MS" pitchFamily="34" charset="-122"/>
                 <a:cs typeface="Trebuchet MS" pitchFamily="34" charset="-120"/>
               </a:rPr>
-              <a:t>der</a:t>
+              <a:t>dered</a:t>
             </a:r>
             <a:endParaRPr lang="en-US" sz="1400" dirty="0"/>
           </a:p>
@@ -27116,7 +28130,7 @@
       </p:sp>
       <p:sp>
         <p:nvSpPr>
-          <p:cNvPr id="33" name="Shape 31"/>
+          <p:cNvPr id="36" name="Shape 34"/>
           <p:cNvSpPr/>
           <p:nvPr/>
         </p:nvSpPr>
@@ -27143,7 +28157,7 @@
       </p:sp>
       <p:sp>
         <p:nvSpPr>
-          <p:cNvPr id="34" name="Text 32"/>
+          <p:cNvPr id="37" name="Text 35"/>
           <p:cNvSpPr/>
           <p:nvPr/>
         </p:nvSpPr>
@@ -27182,7 +28196,7 @@
       </p:sp>
       <p:sp>
         <p:nvSpPr>
-          <p:cNvPr id="35" name="Shape 33"/>
+          <p:cNvPr id="38" name="Shape 36"/>
           <p:cNvSpPr/>
           <p:nvPr/>
         </p:nvSpPr>
@@ -27209,13 +28223,13 @@
       </p:sp>
       <p:sp>
         <p:nvSpPr>
-          <p:cNvPr id="36" name="Shape 34"/>
-          <p:cNvSpPr/>
-          <p:nvPr/>
-        </p:nvSpPr>
-        <p:spPr>
-          <a:xfrm>
-            <a:off x="2427732" y="4169664"/>
+          <p:cNvPr id="39" name="Shape 37"/>
+          <p:cNvSpPr/>
+          <p:nvPr/>
+        </p:nvSpPr>
+        <p:spPr>
+          <a:xfrm>
+            <a:off x="2124837" y="4169664"/>
             <a:ext cx="685800" cy="475488"/>
           </a:xfrm>
           <a:prstGeom prst="rect">
@@ -27236,13 +28250,13 @@
       </p:sp>
       <p:sp>
         <p:nvSpPr>
-          <p:cNvPr id="37" name="Text 35"/>
-          <p:cNvSpPr/>
-          <p:nvPr/>
-        </p:nvSpPr>
-        <p:spPr>
-          <a:xfrm>
-            <a:off x="2427732" y="4169664"/>
+          <p:cNvPr id="40" name="Text 38"/>
+          <p:cNvSpPr/>
+          <p:nvPr/>
+        </p:nvSpPr>
+        <p:spPr>
+          <a:xfrm>
+            <a:off x="2124837" y="4169664"/>
             <a:ext cx="685800" cy="475488"/>
           </a:xfrm>
           <a:prstGeom prst="rect">
@@ -27267,7 +28281,7 @@
                 <a:ea typeface="Trebuchet MS" pitchFamily="34" charset="-122"/>
                 <a:cs typeface="Trebuchet MS" pitchFamily="34" charset="-120"/>
               </a:rPr>
-              <a:t>r</a:t>
+              <a:t>p</a:t>
             </a:r>
             <a:endParaRPr lang="en-US" sz="900" dirty="0"/>
           </a:p>
@@ -27275,13 +28289,13 @@
       </p:sp>
       <p:sp>
         <p:nvSpPr>
-          <p:cNvPr id="38" name="Shape 36"/>
-          <p:cNvSpPr/>
-          <p:nvPr/>
-        </p:nvSpPr>
-        <p:spPr>
-          <a:xfrm>
-            <a:off x="3639312" y="4169664"/>
+          <p:cNvPr id="41" name="Shape 39"/>
+          <p:cNvSpPr/>
+          <p:nvPr/>
+        </p:nvSpPr>
+        <p:spPr>
+          <a:xfrm>
+            <a:off x="3033522" y="4169664"/>
             <a:ext cx="685800" cy="475488"/>
           </a:xfrm>
           <a:prstGeom prst="rect">
@@ -27302,13 +28316,13 @@
       </p:sp>
       <p:sp>
         <p:nvSpPr>
-          <p:cNvPr id="39" name="Text 37"/>
-          <p:cNvSpPr/>
-          <p:nvPr/>
-        </p:nvSpPr>
-        <p:spPr>
-          <a:xfrm>
-            <a:off x="3639312" y="4169664"/>
+          <p:cNvPr id="42" name="Text 40"/>
+          <p:cNvSpPr/>
+          <p:nvPr/>
+        </p:nvSpPr>
+        <p:spPr>
+          <a:xfrm>
+            <a:off x="3033522" y="4169664"/>
             <a:ext cx="685800" cy="475488"/>
           </a:xfrm>
           <a:prstGeom prst="rect">
@@ -27333,7 +28347,7 @@
                 <a:ea typeface="Trebuchet MS" pitchFamily="34" charset="-122"/>
                 <a:cs typeface="Trebuchet MS" pitchFamily="34" charset="-120"/>
               </a:rPr>
-              <a:t>e</a:t>
+              <a:t>r</a:t>
             </a:r>
             <a:endParaRPr lang="en-US" sz="900" dirty="0"/>
           </a:p>
@@ -27341,13 +28355,13 @@
       </p:sp>
       <p:sp>
         <p:nvSpPr>
-          <p:cNvPr id="40" name="Shape 38"/>
-          <p:cNvSpPr/>
-          <p:nvPr/>
-        </p:nvSpPr>
-        <p:spPr>
-          <a:xfrm>
-            <a:off x="4850892" y="4169664"/>
+          <p:cNvPr id="43" name="Shape 41"/>
+          <p:cNvSpPr/>
+          <p:nvPr/>
+        </p:nvSpPr>
+        <p:spPr>
+          <a:xfrm>
+            <a:off x="3942207" y="4169664"/>
             <a:ext cx="685800" cy="475488"/>
           </a:xfrm>
           <a:prstGeom prst="rect">
@@ -27368,13 +28382,13 @@
       </p:sp>
       <p:sp>
         <p:nvSpPr>
-          <p:cNvPr id="41" name="Text 39"/>
-          <p:cNvSpPr/>
-          <p:nvPr/>
-        </p:nvSpPr>
-        <p:spPr>
-          <a:xfrm>
-            <a:off x="4850892" y="4169664"/>
+          <p:cNvPr id="44" name="Text 42"/>
+          <p:cNvSpPr/>
+          <p:nvPr/>
+        </p:nvSpPr>
+        <p:spPr>
+          <a:xfrm>
+            <a:off x="3942207" y="4169664"/>
             <a:ext cx="685800" cy="475488"/>
           </a:xfrm>
           <a:prstGeom prst="rect">
@@ -27399,7 +28413,7 @@
                 <a:ea typeface="Trebuchet MS" pitchFamily="34" charset="-122"/>
                 <a:cs typeface="Trebuchet MS" pitchFamily="34" charset="-120"/>
               </a:rPr>
-              <a:t>or</a:t>
+              <a:t>e</a:t>
             </a:r>
             <a:endParaRPr lang="en-US" sz="900" dirty="0"/>
           </a:p>
@@ -27407,13 +28421,13 @@
       </p:sp>
       <p:sp>
         <p:nvSpPr>
-          <p:cNvPr id="42" name="Shape 40"/>
-          <p:cNvSpPr/>
-          <p:nvPr/>
-        </p:nvSpPr>
-        <p:spPr>
-          <a:xfrm>
-            <a:off x="6062472" y="4169664"/>
+          <p:cNvPr id="45" name="Shape 43"/>
+          <p:cNvSpPr/>
+          <p:nvPr/>
+        </p:nvSpPr>
+        <p:spPr>
+          <a:xfrm>
+            <a:off x="4850892" y="4169664"/>
             <a:ext cx="685800" cy="475488"/>
           </a:xfrm>
           <a:prstGeom prst="rect">
@@ -27434,13 +28448,13 @@
       </p:sp>
       <p:sp>
         <p:nvSpPr>
-          <p:cNvPr id="43" name="Text 41"/>
-          <p:cNvSpPr/>
-          <p:nvPr/>
-        </p:nvSpPr>
-        <p:spPr>
-          <a:xfrm>
-            <a:off x="6062472" y="4169664"/>
+          <p:cNvPr id="46" name="Text 44"/>
+          <p:cNvSpPr/>
+          <p:nvPr/>
+        </p:nvSpPr>
+        <p:spPr>
+          <a:xfrm>
+            <a:off x="4850892" y="4169664"/>
             <a:ext cx="685800" cy="475488"/>
           </a:xfrm>
           <a:prstGeom prst="rect">
@@ -27465,7 +28479,7 @@
                 <a:ea typeface="Trebuchet MS" pitchFamily="34" charset="-122"/>
                 <a:cs typeface="Trebuchet MS" pitchFamily="34" charset="-120"/>
               </a:rPr>
-              <a:t>d</a:t>
+              <a:t>or</a:t>
             </a:r>
             <a:endParaRPr lang="en-US" sz="900" dirty="0"/>
           </a:p>
@@ -27473,13 +28487,13 @@
       </p:sp>
       <p:sp>
         <p:nvSpPr>
-          <p:cNvPr id="44" name="Shape 42"/>
-          <p:cNvSpPr/>
-          <p:nvPr/>
-        </p:nvSpPr>
-        <p:spPr>
-          <a:xfrm>
-            <a:off x="7274052" y="4169664"/>
+          <p:cNvPr id="47" name="Shape 45"/>
+          <p:cNvSpPr/>
+          <p:nvPr/>
+        </p:nvSpPr>
+        <p:spPr>
+          <a:xfrm>
+            <a:off x="5759577" y="4169664"/>
             <a:ext cx="685800" cy="475488"/>
           </a:xfrm>
           <a:prstGeom prst="rect">
@@ -27500,13 +28514,13 @@
       </p:sp>
       <p:sp>
         <p:nvSpPr>
-          <p:cNvPr id="45" name="Text 43"/>
-          <p:cNvSpPr/>
-          <p:nvPr/>
-        </p:nvSpPr>
-        <p:spPr>
-          <a:xfrm>
-            <a:off x="7274052" y="4169664"/>
+          <p:cNvPr id="48" name="Text 46"/>
+          <p:cNvSpPr/>
+          <p:nvPr/>
+        </p:nvSpPr>
+        <p:spPr>
+          <a:xfrm>
+            <a:off x="5759577" y="4169664"/>
             <a:ext cx="685800" cy="475488"/>
           </a:xfrm>
           <a:prstGeom prst="rect">
@@ -27531,7 +28545,139 @@
                 <a:ea typeface="Trebuchet MS" pitchFamily="34" charset="-122"/>
                 <a:cs typeface="Trebuchet MS" pitchFamily="34" charset="-120"/>
               </a:rPr>
+              <a:t>d</a:t>
+            </a:r>
+            <a:endParaRPr lang="en-US" sz="900" dirty="0"/>
+          </a:p>
+        </p:txBody>
+      </p:sp>
+      <p:sp>
+        <p:nvSpPr>
+          <p:cNvPr id="49" name="Shape 47"/>
+          <p:cNvSpPr/>
+          <p:nvPr/>
+        </p:nvSpPr>
+        <p:spPr>
+          <a:xfrm>
+            <a:off x="6668262" y="4169664"/>
+            <a:ext cx="685800" cy="475488"/>
+          </a:xfrm>
+          <a:prstGeom prst="rect">
+            <a:avLst>
+              <a:gd name="adj" fmla="val 7692"/>
+            </a:avLst>
+          </a:prstGeom>
+          <a:solidFill>
+            <a:srgbClr val="FFFFFF"/>
+          </a:solidFill>
+          <a:ln w="12700">
+            <a:solidFill>
+              <a:srgbClr val="DB2777"/>
+            </a:solidFill>
+            <a:prstDash val="solid"/>
+          </a:ln>
+        </p:spPr>
+      </p:sp>
+      <p:sp>
+        <p:nvSpPr>
+          <p:cNvPr id="50" name="Text 48"/>
+          <p:cNvSpPr/>
+          <p:nvPr/>
+        </p:nvSpPr>
+        <p:spPr>
+          <a:xfrm>
+            <a:off x="6668262" y="4169664"/>
+            <a:ext cx="685800" cy="475488"/>
+          </a:xfrm>
+          <a:prstGeom prst="rect">
+            <a:avLst/>
+          </a:prstGeom>
+          <a:noFill/>
+          <a:ln/>
+        </p:spPr>
+        <p:txBody>
+          <a:bodyPr wrap="square" lIns="0" tIns="0" rIns="0" bIns="0" rtlCol="0" anchor="ctr"/>
+          <a:lstStyle/>
+          <a:p>
+            <a:pPr algn="ctr" indent="0" marL="0">
+              <a:buNone/>
+            </a:pPr>
+            <a:r>
+              <a:rPr lang="en-US" sz="900" b="1" dirty="0">
+                <a:solidFill>
+                  <a:srgbClr val="9D174D"/>
+                </a:solidFill>
+                <a:latin typeface="Trebuchet MS" pitchFamily="34" charset="0"/>
+                <a:ea typeface="Trebuchet MS" pitchFamily="34" charset="-122"/>
+                <a:cs typeface="Trebuchet MS" pitchFamily="34" charset="-120"/>
+              </a:rPr>
               <a:t>er</a:t>
+            </a:r>
+            <a:endParaRPr lang="en-US" sz="900" dirty="0"/>
+          </a:p>
+        </p:txBody>
+      </p:sp>
+      <p:sp>
+        <p:nvSpPr>
+          <p:cNvPr id="51" name="Shape 49"/>
+          <p:cNvSpPr/>
+          <p:nvPr/>
+        </p:nvSpPr>
+        <p:spPr>
+          <a:xfrm>
+            <a:off x="7576947" y="4169664"/>
+            <a:ext cx="685800" cy="475488"/>
+          </a:xfrm>
+          <a:prstGeom prst="rect">
+            <a:avLst>
+              <a:gd name="adj" fmla="val 7692"/>
+            </a:avLst>
+          </a:prstGeom>
+          <a:solidFill>
+            <a:srgbClr val="FFFFFF"/>
+          </a:solidFill>
+          <a:ln w="12700">
+            <a:solidFill>
+              <a:srgbClr val="DB2777"/>
+            </a:solidFill>
+            <a:prstDash val="solid"/>
+          </a:ln>
+        </p:spPr>
+      </p:sp>
+      <p:sp>
+        <p:nvSpPr>
+          <p:cNvPr id="52" name="Text 50"/>
+          <p:cNvSpPr/>
+          <p:nvPr/>
+        </p:nvSpPr>
+        <p:spPr>
+          <a:xfrm>
+            <a:off x="7576947" y="4169664"/>
+            <a:ext cx="685800" cy="475488"/>
+          </a:xfrm>
+          <a:prstGeom prst="rect">
+            <a:avLst/>
+          </a:prstGeom>
+          <a:noFill/>
+          <a:ln/>
+        </p:spPr>
+        <p:txBody>
+          <a:bodyPr wrap="square" lIns="0" tIns="0" rIns="0" bIns="0" rtlCol="0" anchor="ctr"/>
+          <a:lstStyle/>
+          <a:p>
+            <a:pPr algn="ctr" indent="0" marL="0">
+              <a:buNone/>
+            </a:pPr>
+            <a:r>
+              <a:rPr lang="en-US" sz="900" b="1" dirty="0">
+                <a:solidFill>
+                  <a:srgbClr val="9D174D"/>
+                </a:solidFill>
+                <a:latin typeface="Trebuchet MS" pitchFamily="34" charset="0"/>
+                <a:ea typeface="Trebuchet MS" pitchFamily="34" charset="-122"/>
+                <a:cs typeface="Trebuchet MS" pitchFamily="34" charset="-120"/>
+              </a:rPr>
+              <a:t>ed</a:t>
             </a:r>
             <a:endParaRPr lang="en-US" sz="900" dirty="0"/>
           </a:p>
@@ -27823,7 +28969,7 @@
                 <a:ea typeface="Calibri" pitchFamily="34" charset="-122"/>
                 <a:cs typeface="Calibri" pitchFamily="34" charset="-120"/>
               </a:rPr>
-              <a:t>Word Labs  •  wordlabs.app  •  Root: 'order' = arrange, sequence, command</a:t>
+              <a:t>Word Labs  •  wordlabs.app  •  Root: 'order' = arrangement, sequence, command</a:t>
             </a:r>
             <a:endParaRPr lang="en-US" sz="800" dirty="0"/>
           </a:p>
@@ -27962,7 +29108,7 @@
                 <a:ea typeface="Trebuchet MS" pitchFamily="34" charset="-122"/>
                 <a:cs typeface="Trebuchet MS" pitchFamily="34" charset="-120"/>
               </a:rPr>
-              <a:t>orderly</a:t>
+              <a:t>orders</a:t>
             </a:r>
             <a:endParaRPr lang="en-US" sz="2800" dirty="0"/>
           </a:p>
@@ -28650,7 +29796,7 @@
                 <a:ea typeface="Calibri" pitchFamily="34" charset="-122"/>
                 <a:cs typeface="Calibri" pitchFamily="34" charset="-120"/>
               </a:rPr>
-              <a:t>Word Labs  •  wordlabs.app  •  Root: 'order' = arrange, sequence, command</a:t>
+              <a:t>Word Labs  •  wordlabs.app  •  Root: 'order' = arrangement, sequence, command</a:t>
             </a:r>
             <a:endParaRPr lang="en-US" sz="800" dirty="0"/>
           </a:p>
@@ -28789,7 +29935,7 @@
                 <a:ea typeface="Trebuchet MS" pitchFamily="34" charset="-122"/>
                 <a:cs typeface="Trebuchet MS" pitchFamily="34" charset="-120"/>
               </a:rPr>
-              <a:t>orderly</a:t>
+              <a:t>orders</a:t>
             </a:r>
             <a:endParaRPr lang="en-US" sz="2800" dirty="0"/>
           </a:p>
@@ -28967,7 +30113,7 @@
                 <a:ea typeface="Calibri" pitchFamily="34" charset="-122"/>
                 <a:cs typeface="Calibri" pitchFamily="34" charset="-120"/>
               </a:rPr>
-              <a:t>arrange, sequence</a:t>
+              <a:t>arrangement, sequence, command</a:t>
             </a:r>
             <a:endParaRPr lang="en-US" sz="850" dirty="0"/>
           </a:p>
@@ -29040,7 +30186,7 @@
                 <a:ea typeface="Trebuchet MS" pitchFamily="34" charset="-122"/>
                 <a:cs typeface="Trebuchet MS" pitchFamily="34" charset="-120"/>
               </a:rPr>
-              <a:t>ly</a:t>
+              <a:t>s</a:t>
             </a:r>
             <a:endParaRPr lang="en-US" sz="1300" dirty="0"/>
           </a:p>
@@ -29079,7 +30225,7 @@
                 <a:ea typeface="Calibri" pitchFamily="34" charset="-122"/>
                 <a:cs typeface="Calibri" pitchFamily="34" charset="-120"/>
               </a:rPr>
-              <a:t>in the manner of</a:t>
+              <a:t>more than one</a:t>
             </a:r>
             <a:endParaRPr lang="en-US" sz="850" dirty="0"/>
           </a:p>
@@ -29635,7 +30781,7 @@
                 <a:ea typeface="Calibri" pitchFamily="34" charset="-122"/>
                 <a:cs typeface="Calibri" pitchFamily="34" charset="-120"/>
               </a:rPr>
-              <a:t>Word Labs  •  wordlabs.app  •  Root: 'order' = arrange, sequence, command</a:t>
+              <a:t>Word Labs  •  wordlabs.app  •  Root: 'order' = arrangement, sequence, command</a:t>
             </a:r>
             <a:endParaRPr lang="en-US" sz="800" dirty="0"/>
           </a:p>
@@ -29774,7 +30920,7 @@
                 <a:ea typeface="Trebuchet MS" pitchFamily="34" charset="-122"/>
                 <a:cs typeface="Trebuchet MS" pitchFamily="34" charset="-120"/>
               </a:rPr>
-              <a:t>orderly</a:t>
+              <a:t>orders</a:t>
             </a:r>
             <a:endParaRPr lang="en-US" sz="2800" dirty="0"/>
           </a:p>
@@ -29952,7 +31098,7 @@
                 <a:ea typeface="Calibri" pitchFamily="34" charset="-122"/>
                 <a:cs typeface="Calibri" pitchFamily="34" charset="-120"/>
               </a:rPr>
-              <a:t>arrange, sequence</a:t>
+              <a:t>arrangement, sequence, command</a:t>
             </a:r>
             <a:endParaRPr lang="en-US" sz="850" dirty="0"/>
           </a:p>
@@ -30025,7 +31171,7 @@
                 <a:ea typeface="Trebuchet MS" pitchFamily="34" charset="-122"/>
                 <a:cs typeface="Trebuchet MS" pitchFamily="34" charset="-120"/>
               </a:rPr>
-              <a:t>ly</a:t>
+              <a:t>s</a:t>
             </a:r>
             <a:endParaRPr lang="en-US" sz="1300" dirty="0"/>
           </a:p>
@@ -30064,7 +31210,7 @@
                 <a:ea typeface="Calibri" pitchFamily="34" charset="-122"/>
                 <a:cs typeface="Calibri" pitchFamily="34" charset="-120"/>
               </a:rPr>
-              <a:t>in the manner of</a:t>
+              <a:t>more than one</a:t>
             </a:r>
             <a:endParaRPr lang="en-US" sz="850" dirty="0"/>
           </a:p>
@@ -30171,7 +31317,7 @@
         </p:nvSpPr>
         <p:spPr>
           <a:xfrm>
-            <a:off x="2313432" y="3364992"/>
+            <a:off x="2999232" y="3364992"/>
             <a:ext cx="1645920" cy="475488"/>
           </a:xfrm>
           <a:prstGeom prst="rect">
@@ -30198,7 +31344,7 @@
         </p:nvSpPr>
         <p:spPr>
           <a:xfrm>
-            <a:off x="2313432" y="3364992"/>
+            <a:off x="2999232" y="3364992"/>
             <a:ext cx="1645920" cy="475488"/>
           </a:xfrm>
           <a:prstGeom prst="rect">
@@ -30237,8 +31383,8 @@
         </p:nvSpPr>
         <p:spPr>
           <a:xfrm>
-            <a:off x="3959352" y="3364992"/>
-            <a:ext cx="411480" cy="475488"/>
+            <a:off x="4645152" y="3364992"/>
+            <a:ext cx="1097280" cy="475488"/>
           </a:xfrm>
           <a:prstGeom prst="rect">
             <a:avLst/>
@@ -30276,7 +31422,7 @@
         </p:nvSpPr>
         <p:spPr>
           <a:xfrm>
-            <a:off x="4370832" y="3364992"/>
+            <a:off x="5742432" y="3364992"/>
             <a:ext cx="1645920" cy="475488"/>
           </a:xfrm>
           <a:prstGeom prst="rect">
@@ -30303,7 +31449,7 @@
         </p:nvSpPr>
         <p:spPr>
           <a:xfrm>
-            <a:off x="4370832" y="3364992"/>
+            <a:off x="5742432" y="3364992"/>
             <a:ext cx="1645920" cy="475488"/>
           </a:xfrm>
           <a:prstGeom prst="rect">
@@ -30328,7 +31474,7 @@
                 <a:ea typeface="Trebuchet MS" pitchFamily="34" charset="-122"/>
                 <a:cs typeface="Trebuchet MS" pitchFamily="34" charset="-120"/>
               </a:rPr>
-              <a:t>der</a:t>
+              <a:t>ders</a:t>
             </a:r>
             <a:endParaRPr lang="en-US" sz="1400" dirty="0"/>
           </a:p>
@@ -30336,119 +31482,80 @@
       </p:sp>
       <p:sp>
         <p:nvSpPr>
-          <p:cNvPr id="30" name="Text 28"/>
-          <p:cNvSpPr/>
-          <p:nvPr/>
-        </p:nvSpPr>
-        <p:spPr>
-          <a:xfrm>
-            <a:off x="6016752" y="3364992"/>
-            <a:ext cx="411480" cy="475488"/>
-          </a:xfrm>
-          <a:prstGeom prst="rect">
-            <a:avLst/>
-          </a:prstGeom>
-          <a:noFill/>
-          <a:ln/>
-        </p:spPr>
-        <p:txBody>
-          <a:bodyPr wrap="square" lIns="0" tIns="0" rIns="0" bIns="0" rtlCol="0" anchor="ctr"/>
-          <a:lstStyle/>
-          <a:p>
-            <a:pPr algn="ctr" indent="0" marL="0">
-              <a:buNone/>
-            </a:pPr>
-            <a:r>
-              <a:rPr lang="en-US" sz="1600" b="1" dirty="0">
-                <a:solidFill>
-                  <a:srgbClr val="0D9488"/>
+          <p:cNvPr id="30" name="Shape 28"/>
+          <p:cNvSpPr/>
+          <p:nvPr/>
+        </p:nvSpPr>
+        <p:spPr>
+          <a:xfrm>
+            <a:off x="365760" y="4096512"/>
+            <a:ext cx="1371600" cy="804672"/>
+          </a:xfrm>
+          <a:prstGeom prst="rect">
+            <a:avLst>
+              <a:gd name="adj" fmla="val 6818"/>
+            </a:avLst>
+          </a:prstGeom>
+          <a:solidFill>
+            <a:srgbClr val="E2E8F0"/>
+          </a:solidFill>
+          <a:ln w="12700">
+            <a:solidFill>
+              <a:srgbClr val="E2E8F0"/>
+            </a:solidFill>
+            <a:prstDash val="solid"/>
+          </a:ln>
+        </p:spPr>
+      </p:sp>
+      <p:sp>
+        <p:nvSpPr>
+          <p:cNvPr id="31" name="Text 29"/>
+          <p:cNvSpPr/>
+          <p:nvPr/>
+        </p:nvSpPr>
+        <p:spPr>
+          <a:xfrm>
+            <a:off x="365760" y="4096512"/>
+            <a:ext cx="1371600" cy="804672"/>
+          </a:xfrm>
+          <a:prstGeom prst="rect">
+            <a:avLst/>
+          </a:prstGeom>
+          <a:noFill/>
+          <a:ln/>
+        </p:spPr>
+        <p:txBody>
+          <a:bodyPr wrap="square" lIns="0" tIns="0" rIns="0" bIns="0" rtlCol="0" anchor="ctr"/>
+          <a:lstStyle/>
+          <a:p>
+            <a:pPr algn="ctr" indent="0" marL="0">
+              <a:buNone/>
+            </a:pPr>
+            <a:r>
+              <a:rPr lang="en-US" sz="1100" b="1" dirty="0">
+                <a:solidFill>
+                  <a:srgbClr val="475569"/>
                 </a:solidFill>
                 <a:latin typeface="Trebuchet MS" pitchFamily="34" charset="0"/>
                 <a:ea typeface="Trebuchet MS" pitchFamily="34" charset="-122"/>
                 <a:cs typeface="Trebuchet MS" pitchFamily="34" charset="-120"/>
               </a:rPr>
-              <a:t>·</a:t>
-            </a:r>
-            <a:endParaRPr lang="en-US" sz="1600" dirty="0"/>
-          </a:p>
-        </p:txBody>
-      </p:sp>
-      <p:sp>
-        <p:nvSpPr>
-          <p:cNvPr id="31" name="Shape 29"/>
-          <p:cNvSpPr/>
-          <p:nvPr/>
-        </p:nvSpPr>
-        <p:spPr>
-          <a:xfrm>
-            <a:off x="6428232" y="3364992"/>
-            <a:ext cx="1645920" cy="475488"/>
-          </a:xfrm>
-          <a:prstGeom prst="rect">
-            <a:avLst>
-              <a:gd name="adj" fmla="val 9615"/>
-            </a:avLst>
-          </a:prstGeom>
-          <a:solidFill>
-            <a:srgbClr val="FFFFFF"/>
-          </a:solidFill>
-          <a:ln w="12700">
-            <a:solidFill>
-              <a:srgbClr val="0D9488"/>
-            </a:solidFill>
-            <a:prstDash val="solid"/>
-          </a:ln>
-        </p:spPr>
-      </p:sp>
-      <p:sp>
-        <p:nvSpPr>
-          <p:cNvPr id="32" name="Text 30"/>
-          <p:cNvSpPr/>
-          <p:nvPr/>
-        </p:nvSpPr>
-        <p:spPr>
-          <a:xfrm>
-            <a:off x="6428232" y="3364992"/>
-            <a:ext cx="1645920" cy="475488"/>
-          </a:xfrm>
-          <a:prstGeom prst="rect">
-            <a:avLst/>
-          </a:prstGeom>
-          <a:noFill/>
-          <a:ln/>
-        </p:spPr>
-        <p:txBody>
-          <a:bodyPr wrap="square" lIns="0" tIns="0" rIns="0" bIns="0" rtlCol="0" anchor="ctr"/>
-          <a:lstStyle/>
-          <a:p>
-            <a:pPr algn="ctr" indent="0" marL="0">
-              <a:buNone/>
-            </a:pPr>
-            <a:r>
-              <a:rPr lang="en-US" sz="1400" b="1" dirty="0">
-                <a:solidFill>
-                  <a:srgbClr val="0D9488"/>
-                </a:solidFill>
-                <a:latin typeface="Trebuchet MS" pitchFamily="34" charset="0"/>
-                <a:ea typeface="Trebuchet MS" pitchFamily="34" charset="-122"/>
-                <a:cs typeface="Trebuchet MS" pitchFamily="34" charset="-120"/>
-              </a:rPr>
-              <a:t>ly</a:t>
-            </a:r>
-            <a:endParaRPr lang="en-US" sz="1400" dirty="0"/>
-          </a:p>
-        </p:txBody>
-      </p:sp>
-      <p:sp>
-        <p:nvSpPr>
-          <p:cNvPr id="33" name="Shape 31"/>
-          <p:cNvSpPr/>
-          <p:nvPr/>
-        </p:nvSpPr>
-        <p:spPr>
-          <a:xfrm>
-            <a:off x="365760" y="4096512"/>
-            <a:ext cx="1371600" cy="804672"/>
+              <a:t>Phonemes</a:t>
+            </a:r>
+            <a:endParaRPr lang="en-US" sz="1100" dirty="0"/>
+          </a:p>
+        </p:txBody>
+      </p:sp>
+      <p:sp>
+        <p:nvSpPr>
+          <p:cNvPr id="32" name="Shape 30"/>
+          <p:cNvSpPr/>
+          <p:nvPr/>
+        </p:nvSpPr>
+        <p:spPr>
+          <a:xfrm>
+            <a:off x="1874520" y="4096512"/>
+            <a:ext cx="6903720" cy="804672"/>
           </a:xfrm>
           <a:prstGeom prst="rect">
             <a:avLst>
@@ -30456,85 +31563,19 @@
             </a:avLst>
           </a:prstGeom>
           <a:solidFill>
-            <a:srgbClr val="E2E8F0"/>
+            <a:srgbClr val="F8FAFC"/>
           </a:solidFill>
           <a:ln w="12700">
             <a:solidFill>
               <a:srgbClr val="E2E8F0"/>
             </a:solidFill>
-            <a:prstDash val="solid"/>
-          </a:ln>
-        </p:spPr>
-      </p:sp>
-      <p:sp>
-        <p:nvSpPr>
-          <p:cNvPr id="34" name="Text 32"/>
-          <p:cNvSpPr/>
-          <p:nvPr/>
-        </p:nvSpPr>
-        <p:spPr>
-          <a:xfrm>
-            <a:off x="365760" y="4096512"/>
-            <a:ext cx="1371600" cy="804672"/>
-          </a:xfrm>
-          <a:prstGeom prst="rect">
-            <a:avLst/>
-          </a:prstGeom>
-          <a:noFill/>
-          <a:ln/>
-        </p:spPr>
-        <p:txBody>
-          <a:bodyPr wrap="square" lIns="0" tIns="0" rIns="0" bIns="0" rtlCol="0" anchor="ctr"/>
-          <a:lstStyle/>
-          <a:p>
-            <a:pPr algn="ctr" indent="0" marL="0">
-              <a:buNone/>
-            </a:pPr>
-            <a:r>
-              <a:rPr lang="en-US" sz="1100" b="1" dirty="0">
-                <a:solidFill>
-                  <a:srgbClr val="475569"/>
-                </a:solidFill>
-                <a:latin typeface="Trebuchet MS" pitchFamily="34" charset="0"/>
-                <a:ea typeface="Trebuchet MS" pitchFamily="34" charset="-122"/>
-                <a:cs typeface="Trebuchet MS" pitchFamily="34" charset="-120"/>
-              </a:rPr>
-              <a:t>Phonemes</a:t>
-            </a:r>
-            <a:endParaRPr lang="en-US" sz="1100" dirty="0"/>
-          </a:p>
-        </p:txBody>
-      </p:sp>
-      <p:sp>
-        <p:nvSpPr>
-          <p:cNvPr id="35" name="Shape 33"/>
-          <p:cNvSpPr/>
-          <p:nvPr/>
-        </p:nvSpPr>
-        <p:spPr>
-          <a:xfrm>
-            <a:off x="1874520" y="4096512"/>
-            <a:ext cx="6903720" cy="804672"/>
-          </a:xfrm>
-          <a:prstGeom prst="rect">
-            <a:avLst>
-              <a:gd name="adj" fmla="val 6818"/>
-            </a:avLst>
-          </a:prstGeom>
-          <a:solidFill>
-            <a:srgbClr val="F8FAFC"/>
-          </a:solidFill>
-          <a:ln w="12700">
-            <a:solidFill>
-              <a:srgbClr val="E2E8F0"/>
-            </a:solidFill>
             <a:prstDash val="dash"/>
           </a:ln>
         </p:spPr>
       </p:sp>
       <p:sp>
         <p:nvSpPr>
-          <p:cNvPr id="36" name="Text 34"/>
+          <p:cNvPr id="33" name="Text 31"/>
           <p:cNvSpPr/>
           <p:nvPr/>
         </p:nvSpPr>
@@ -30857,7 +31898,7 @@
                 <a:ea typeface="Calibri" pitchFamily="34" charset="-122"/>
                 <a:cs typeface="Calibri" pitchFamily="34" charset="-120"/>
               </a:rPr>
-              <a:t>Word Labs  •  wordlabs.app  •  Root: 'order' = arrange, sequence, command</a:t>
+              <a:t>Word Labs  •  wordlabs.app  •  Root: 'order' = arrangement, sequence, command</a:t>
             </a:r>
             <a:endParaRPr lang="en-US" sz="800" dirty="0"/>
           </a:p>
@@ -30996,7 +32037,7 @@
                 <a:ea typeface="Trebuchet MS" pitchFamily="34" charset="-122"/>
                 <a:cs typeface="Trebuchet MS" pitchFamily="34" charset="-120"/>
               </a:rPr>
-              <a:t>orderly</a:t>
+              <a:t>orders</a:t>
             </a:r>
             <a:endParaRPr lang="en-US" sz="2800" dirty="0"/>
           </a:p>
@@ -31174,7 +32215,7 @@
                 <a:ea typeface="Calibri" pitchFamily="34" charset="-122"/>
                 <a:cs typeface="Calibri" pitchFamily="34" charset="-120"/>
               </a:rPr>
-              <a:t>arrange, sequence</a:t>
+              <a:t>arrangement, sequence, command</a:t>
             </a:r>
             <a:endParaRPr lang="en-US" sz="850" dirty="0"/>
           </a:p>
@@ -31247,7 +32288,7 @@
                 <a:ea typeface="Trebuchet MS" pitchFamily="34" charset="-122"/>
                 <a:cs typeface="Trebuchet MS" pitchFamily="34" charset="-120"/>
               </a:rPr>
-              <a:t>ly</a:t>
+              <a:t>s</a:t>
             </a:r>
             <a:endParaRPr lang="en-US" sz="1300" dirty="0"/>
           </a:p>
@@ -31286,7 +32327,7 @@
                 <a:ea typeface="Calibri" pitchFamily="34" charset="-122"/>
                 <a:cs typeface="Calibri" pitchFamily="34" charset="-120"/>
               </a:rPr>
-              <a:t>in the manner of</a:t>
+              <a:t>more than one</a:t>
             </a:r>
             <a:endParaRPr lang="en-US" sz="850" dirty="0"/>
           </a:p>
@@ -31393,7 +32434,7 @@
         </p:nvSpPr>
         <p:spPr>
           <a:xfrm>
-            <a:off x="2313432" y="3364992"/>
+            <a:off x="2999232" y="3364992"/>
             <a:ext cx="1645920" cy="475488"/>
           </a:xfrm>
           <a:prstGeom prst="rect">
@@ -31420,7 +32461,7 @@
         </p:nvSpPr>
         <p:spPr>
           <a:xfrm>
-            <a:off x="2313432" y="3364992"/>
+            <a:off x="2999232" y="3364992"/>
             <a:ext cx="1645920" cy="475488"/>
           </a:xfrm>
           <a:prstGeom prst="rect">
@@ -31459,8 +32500,8 @@
         </p:nvSpPr>
         <p:spPr>
           <a:xfrm>
-            <a:off x="3959352" y="3364992"/>
-            <a:ext cx="411480" cy="475488"/>
+            <a:off x="4645152" y="3364992"/>
+            <a:ext cx="1097280" cy="475488"/>
           </a:xfrm>
           <a:prstGeom prst="rect">
             <a:avLst/>
@@ -31498,7 +32539,7 @@
         </p:nvSpPr>
         <p:spPr>
           <a:xfrm>
-            <a:off x="4370832" y="3364992"/>
+            <a:off x="5742432" y="3364992"/>
             <a:ext cx="1645920" cy="475488"/>
           </a:xfrm>
           <a:prstGeom prst="rect">
@@ -31525,7 +32566,7 @@
         </p:nvSpPr>
         <p:spPr>
           <a:xfrm>
-            <a:off x="4370832" y="3364992"/>
+            <a:off x="5742432" y="3364992"/>
             <a:ext cx="1645920" cy="475488"/>
           </a:xfrm>
           <a:prstGeom prst="rect">
@@ -31550,7 +32591,7 @@
                 <a:ea typeface="Trebuchet MS" pitchFamily="34" charset="-122"/>
                 <a:cs typeface="Trebuchet MS" pitchFamily="34" charset="-120"/>
               </a:rPr>
-              <a:t>der</a:t>
+              <a:t>ders</a:t>
             </a:r>
             <a:endParaRPr lang="en-US" sz="1400" dirty="0"/>
           </a:p>
@@ -31558,211 +32599,238 @@
       </p:sp>
       <p:sp>
         <p:nvSpPr>
-          <p:cNvPr id="30" name="Text 28"/>
-          <p:cNvSpPr/>
-          <p:nvPr/>
-        </p:nvSpPr>
-        <p:spPr>
-          <a:xfrm>
-            <a:off x="6016752" y="3364992"/>
-            <a:ext cx="411480" cy="475488"/>
-          </a:xfrm>
-          <a:prstGeom prst="rect">
-            <a:avLst/>
-          </a:prstGeom>
-          <a:noFill/>
-          <a:ln/>
-        </p:spPr>
-        <p:txBody>
-          <a:bodyPr wrap="square" lIns="0" tIns="0" rIns="0" bIns="0" rtlCol="0" anchor="ctr"/>
-          <a:lstStyle/>
-          <a:p>
-            <a:pPr algn="ctr" indent="0" marL="0">
-              <a:buNone/>
-            </a:pPr>
-            <a:r>
-              <a:rPr lang="en-US" sz="1600" b="1" dirty="0">
-                <a:solidFill>
-                  <a:srgbClr val="0D9488"/>
+          <p:cNvPr id="30" name="Shape 28"/>
+          <p:cNvSpPr/>
+          <p:nvPr/>
+        </p:nvSpPr>
+        <p:spPr>
+          <a:xfrm>
+            <a:off x="365760" y="4096512"/>
+            <a:ext cx="1371600" cy="804672"/>
+          </a:xfrm>
+          <a:prstGeom prst="rect">
+            <a:avLst>
+              <a:gd name="adj" fmla="val 6818"/>
+            </a:avLst>
+          </a:prstGeom>
+          <a:solidFill>
+            <a:srgbClr val="E2E8F0"/>
+          </a:solidFill>
+          <a:ln w="12700">
+            <a:solidFill>
+              <a:srgbClr val="E2E8F0"/>
+            </a:solidFill>
+            <a:prstDash val="solid"/>
+          </a:ln>
+        </p:spPr>
+      </p:sp>
+      <p:sp>
+        <p:nvSpPr>
+          <p:cNvPr id="31" name="Text 29"/>
+          <p:cNvSpPr/>
+          <p:nvPr/>
+        </p:nvSpPr>
+        <p:spPr>
+          <a:xfrm>
+            <a:off x="365760" y="4096512"/>
+            <a:ext cx="1371600" cy="804672"/>
+          </a:xfrm>
+          <a:prstGeom prst="rect">
+            <a:avLst/>
+          </a:prstGeom>
+          <a:noFill/>
+          <a:ln/>
+        </p:spPr>
+        <p:txBody>
+          <a:bodyPr wrap="square" lIns="0" tIns="0" rIns="0" bIns="0" rtlCol="0" anchor="ctr"/>
+          <a:lstStyle/>
+          <a:p>
+            <a:pPr algn="ctr" indent="0" marL="0">
+              <a:buNone/>
+            </a:pPr>
+            <a:r>
+              <a:rPr lang="en-US" sz="1100" b="1" dirty="0">
+                <a:solidFill>
+                  <a:srgbClr val="475569"/>
                 </a:solidFill>
                 <a:latin typeface="Trebuchet MS" pitchFamily="34" charset="0"/>
                 <a:ea typeface="Trebuchet MS" pitchFamily="34" charset="-122"/>
                 <a:cs typeface="Trebuchet MS" pitchFamily="34" charset="-120"/>
               </a:rPr>
-              <a:t>·</a:t>
-            </a:r>
-            <a:endParaRPr lang="en-US" sz="1600" dirty="0"/>
-          </a:p>
-        </p:txBody>
-      </p:sp>
-      <p:sp>
-        <p:nvSpPr>
-          <p:cNvPr id="31" name="Shape 29"/>
-          <p:cNvSpPr/>
-          <p:nvPr/>
-        </p:nvSpPr>
-        <p:spPr>
-          <a:xfrm>
-            <a:off x="6428232" y="3364992"/>
-            <a:ext cx="1645920" cy="475488"/>
+              <a:t>Phonemes</a:t>
+            </a:r>
+            <a:endParaRPr lang="en-US" sz="1100" dirty="0"/>
+          </a:p>
+        </p:txBody>
+      </p:sp>
+      <p:sp>
+        <p:nvSpPr>
+          <p:cNvPr id="32" name="Shape 30"/>
+          <p:cNvSpPr/>
+          <p:nvPr/>
+        </p:nvSpPr>
+        <p:spPr>
+          <a:xfrm>
+            <a:off x="1874520" y="4096512"/>
+            <a:ext cx="6903720" cy="658368"/>
           </a:xfrm>
           <a:prstGeom prst="rect">
             <a:avLst>
-              <a:gd name="adj" fmla="val 9615"/>
+              <a:gd name="adj" fmla="val 8333"/>
             </a:avLst>
           </a:prstGeom>
           <a:solidFill>
+            <a:srgbClr val="FCE7F3"/>
+          </a:solidFill>
+          <a:ln w="12700">
+            <a:solidFill>
+              <a:srgbClr val="DB2777"/>
+            </a:solidFill>
+            <a:prstDash val="solid"/>
+          </a:ln>
+        </p:spPr>
+      </p:sp>
+      <p:sp>
+        <p:nvSpPr>
+          <p:cNvPr id="33" name="Shape 31"/>
+          <p:cNvSpPr/>
+          <p:nvPr/>
+        </p:nvSpPr>
+        <p:spPr>
+          <a:xfrm>
+            <a:off x="2670048" y="4169664"/>
+            <a:ext cx="685800" cy="475488"/>
+          </a:xfrm>
+          <a:prstGeom prst="rect">
+            <a:avLst>
+              <a:gd name="adj" fmla="val 7692"/>
+            </a:avLst>
+          </a:prstGeom>
+          <a:solidFill>
             <a:srgbClr val="FFFFFF"/>
           </a:solidFill>
           <a:ln w="12700">
             <a:solidFill>
-              <a:srgbClr val="0D9488"/>
-            </a:solidFill>
-            <a:prstDash val="solid"/>
-          </a:ln>
-        </p:spPr>
-      </p:sp>
-      <p:sp>
-        <p:nvSpPr>
-          <p:cNvPr id="32" name="Text 30"/>
-          <p:cNvSpPr/>
-          <p:nvPr/>
-        </p:nvSpPr>
-        <p:spPr>
-          <a:xfrm>
-            <a:off x="6428232" y="3364992"/>
-            <a:ext cx="1645920" cy="475488"/>
-          </a:xfrm>
-          <a:prstGeom prst="rect">
-            <a:avLst/>
-          </a:prstGeom>
-          <a:noFill/>
-          <a:ln/>
-        </p:spPr>
-        <p:txBody>
-          <a:bodyPr wrap="square" lIns="0" tIns="0" rIns="0" bIns="0" rtlCol="0" anchor="ctr"/>
-          <a:lstStyle/>
-          <a:p>
-            <a:pPr algn="ctr" indent="0" marL="0">
-              <a:buNone/>
-            </a:pPr>
-            <a:r>
-              <a:rPr lang="en-US" sz="1400" b="1" dirty="0">
-                <a:solidFill>
-                  <a:srgbClr val="0D9488"/>
+              <a:srgbClr val="DB2777"/>
+            </a:solidFill>
+            <a:prstDash val="solid"/>
+          </a:ln>
+        </p:spPr>
+      </p:sp>
+      <p:sp>
+        <p:nvSpPr>
+          <p:cNvPr id="34" name="Text 32"/>
+          <p:cNvSpPr/>
+          <p:nvPr/>
+        </p:nvSpPr>
+        <p:spPr>
+          <a:xfrm>
+            <a:off x="2670048" y="4169664"/>
+            <a:ext cx="685800" cy="475488"/>
+          </a:xfrm>
+          <a:prstGeom prst="rect">
+            <a:avLst/>
+          </a:prstGeom>
+          <a:noFill/>
+          <a:ln/>
+        </p:spPr>
+        <p:txBody>
+          <a:bodyPr wrap="square" lIns="0" tIns="0" rIns="0" bIns="0" rtlCol="0" anchor="ctr"/>
+          <a:lstStyle/>
+          <a:p>
+            <a:pPr algn="ctr" indent="0" marL="0">
+              <a:buNone/>
+            </a:pPr>
+            <a:r>
+              <a:rPr lang="en-US" sz="900" b="1" dirty="0">
+                <a:solidFill>
+                  <a:srgbClr val="9D174D"/>
                 </a:solidFill>
                 <a:latin typeface="Trebuchet MS" pitchFamily="34" charset="0"/>
                 <a:ea typeface="Trebuchet MS" pitchFamily="34" charset="-122"/>
                 <a:cs typeface="Trebuchet MS" pitchFamily="34" charset="-120"/>
               </a:rPr>
-              <a:t>ly</a:t>
-            </a:r>
-            <a:endParaRPr lang="en-US" sz="1400" dirty="0"/>
-          </a:p>
-        </p:txBody>
-      </p:sp>
-      <p:sp>
-        <p:nvSpPr>
-          <p:cNvPr id="33" name="Shape 31"/>
-          <p:cNvSpPr/>
-          <p:nvPr/>
-        </p:nvSpPr>
-        <p:spPr>
-          <a:xfrm>
-            <a:off x="365760" y="4096512"/>
-            <a:ext cx="1371600" cy="804672"/>
+              <a:t>or</a:t>
+            </a:r>
+            <a:endParaRPr lang="en-US" sz="900" dirty="0"/>
+          </a:p>
+        </p:txBody>
+      </p:sp>
+      <p:sp>
+        <p:nvSpPr>
+          <p:cNvPr id="35" name="Shape 33"/>
+          <p:cNvSpPr/>
+          <p:nvPr/>
+        </p:nvSpPr>
+        <p:spPr>
+          <a:xfrm>
+            <a:off x="4123944" y="4169664"/>
+            <a:ext cx="685800" cy="475488"/>
           </a:xfrm>
           <a:prstGeom prst="rect">
             <a:avLst>
-              <a:gd name="adj" fmla="val 6818"/>
+              <a:gd name="adj" fmla="val 7692"/>
             </a:avLst>
           </a:prstGeom>
           <a:solidFill>
-            <a:srgbClr val="E2E8F0"/>
-          </a:solidFill>
-          <a:ln w="12700">
-            <a:solidFill>
-              <a:srgbClr val="E2E8F0"/>
-            </a:solidFill>
-            <a:prstDash val="solid"/>
-          </a:ln>
-        </p:spPr>
-      </p:sp>
-      <p:sp>
-        <p:nvSpPr>
-          <p:cNvPr id="34" name="Text 32"/>
-          <p:cNvSpPr/>
-          <p:nvPr/>
-        </p:nvSpPr>
-        <p:spPr>
-          <a:xfrm>
-            <a:off x="365760" y="4096512"/>
-            <a:ext cx="1371600" cy="804672"/>
-          </a:xfrm>
-          <a:prstGeom prst="rect">
-            <a:avLst/>
-          </a:prstGeom>
-          <a:noFill/>
-          <a:ln/>
-        </p:spPr>
-        <p:txBody>
-          <a:bodyPr wrap="square" lIns="0" tIns="0" rIns="0" bIns="0" rtlCol="0" anchor="ctr"/>
-          <a:lstStyle/>
-          <a:p>
-            <a:pPr algn="ctr" indent="0" marL="0">
-              <a:buNone/>
-            </a:pPr>
-            <a:r>
-              <a:rPr lang="en-US" sz="1100" b="1" dirty="0">
-                <a:solidFill>
-                  <a:srgbClr val="475569"/>
+            <a:srgbClr val="FFFFFF"/>
+          </a:solidFill>
+          <a:ln w="12700">
+            <a:solidFill>
+              <a:srgbClr val="DB2777"/>
+            </a:solidFill>
+            <a:prstDash val="solid"/>
+          </a:ln>
+        </p:spPr>
+      </p:sp>
+      <p:sp>
+        <p:nvSpPr>
+          <p:cNvPr id="36" name="Text 34"/>
+          <p:cNvSpPr/>
+          <p:nvPr/>
+        </p:nvSpPr>
+        <p:spPr>
+          <a:xfrm>
+            <a:off x="4123944" y="4169664"/>
+            <a:ext cx="685800" cy="475488"/>
+          </a:xfrm>
+          <a:prstGeom prst="rect">
+            <a:avLst/>
+          </a:prstGeom>
+          <a:noFill/>
+          <a:ln/>
+        </p:spPr>
+        <p:txBody>
+          <a:bodyPr wrap="square" lIns="0" tIns="0" rIns="0" bIns="0" rtlCol="0" anchor="ctr"/>
+          <a:lstStyle/>
+          <a:p>
+            <a:pPr algn="ctr" indent="0" marL="0">
+              <a:buNone/>
+            </a:pPr>
+            <a:r>
+              <a:rPr lang="en-US" sz="900" b="1" dirty="0">
+                <a:solidFill>
+                  <a:srgbClr val="9D174D"/>
                 </a:solidFill>
                 <a:latin typeface="Trebuchet MS" pitchFamily="34" charset="0"/>
                 <a:ea typeface="Trebuchet MS" pitchFamily="34" charset="-122"/>
                 <a:cs typeface="Trebuchet MS" pitchFamily="34" charset="-120"/>
               </a:rPr>
-              <a:t>Phonemes</a:t>
-            </a:r>
-            <a:endParaRPr lang="en-US" sz="1100" dirty="0"/>
-          </a:p>
-        </p:txBody>
-      </p:sp>
-      <p:sp>
-        <p:nvSpPr>
-          <p:cNvPr id="35" name="Shape 33"/>
-          <p:cNvSpPr/>
-          <p:nvPr/>
-        </p:nvSpPr>
-        <p:spPr>
-          <a:xfrm>
-            <a:off x="1874520" y="4096512"/>
-            <a:ext cx="6903720" cy="658368"/>
-          </a:xfrm>
-          <a:prstGeom prst="rect">
-            <a:avLst>
-              <a:gd name="adj" fmla="val 8333"/>
-            </a:avLst>
-          </a:prstGeom>
-          <a:solidFill>
-            <a:srgbClr val="FCE7F3"/>
-          </a:solidFill>
-          <a:ln w="12700">
-            <a:solidFill>
-              <a:srgbClr val="DB2777"/>
-            </a:solidFill>
-            <a:prstDash val="solid"/>
-          </a:ln>
-        </p:spPr>
-      </p:sp>
-      <p:sp>
-        <p:nvSpPr>
-          <p:cNvPr id="36" name="Shape 34"/>
-          <p:cNvSpPr/>
-          <p:nvPr/>
-        </p:nvSpPr>
-        <p:spPr>
-          <a:xfrm>
-            <a:off x="2427732" y="4169664"/>
+              <a:t>d</a:t>
+            </a:r>
+            <a:endParaRPr lang="en-US" sz="900" dirty="0"/>
+          </a:p>
+        </p:txBody>
+      </p:sp>
+      <p:sp>
+        <p:nvSpPr>
+          <p:cNvPr id="37" name="Shape 35"/>
+          <p:cNvSpPr/>
+          <p:nvPr/>
+        </p:nvSpPr>
+        <p:spPr>
+          <a:xfrm>
+            <a:off x="5577840" y="4169664"/>
             <a:ext cx="685800" cy="475488"/>
           </a:xfrm>
           <a:prstGeom prst="rect">
@@ -31783,13 +32851,13 @@
       </p:sp>
       <p:sp>
         <p:nvSpPr>
-          <p:cNvPr id="37" name="Text 35"/>
-          <p:cNvSpPr/>
-          <p:nvPr/>
-        </p:nvSpPr>
-        <p:spPr>
-          <a:xfrm>
-            <a:off x="2427732" y="4169664"/>
+          <p:cNvPr id="38" name="Text 36"/>
+          <p:cNvSpPr/>
+          <p:nvPr/>
+        </p:nvSpPr>
+        <p:spPr>
+          <a:xfrm>
+            <a:off x="5577840" y="4169664"/>
             <a:ext cx="685800" cy="475488"/>
           </a:xfrm>
           <a:prstGeom prst="rect">
@@ -31814,7 +32882,7 @@
                 <a:ea typeface="Trebuchet MS" pitchFamily="34" charset="-122"/>
                 <a:cs typeface="Trebuchet MS" pitchFamily="34" charset="-120"/>
               </a:rPr>
-              <a:t>or</a:t>
+              <a:t>er</a:t>
             </a:r>
             <a:endParaRPr lang="en-US" sz="900" dirty="0"/>
           </a:p>
@@ -31822,13 +32890,13 @@
       </p:sp>
       <p:sp>
         <p:nvSpPr>
-          <p:cNvPr id="38" name="Shape 36"/>
-          <p:cNvSpPr/>
-          <p:nvPr/>
-        </p:nvSpPr>
-        <p:spPr>
-          <a:xfrm>
-            <a:off x="3639312" y="4169664"/>
+          <p:cNvPr id="39" name="Shape 37"/>
+          <p:cNvSpPr/>
+          <p:nvPr/>
+        </p:nvSpPr>
+        <p:spPr>
+          <a:xfrm>
+            <a:off x="7031736" y="4169664"/>
             <a:ext cx="685800" cy="475488"/>
           </a:xfrm>
           <a:prstGeom prst="rect">
@@ -31849,13 +32917,13 @@
       </p:sp>
       <p:sp>
         <p:nvSpPr>
-          <p:cNvPr id="39" name="Text 37"/>
-          <p:cNvSpPr/>
-          <p:nvPr/>
-        </p:nvSpPr>
-        <p:spPr>
-          <a:xfrm>
-            <a:off x="3639312" y="4169664"/>
+          <p:cNvPr id="40" name="Text 38"/>
+          <p:cNvSpPr/>
+          <p:nvPr/>
+        </p:nvSpPr>
+        <p:spPr>
+          <a:xfrm>
+            <a:off x="7031736" y="4169664"/>
             <a:ext cx="685800" cy="475488"/>
           </a:xfrm>
           <a:prstGeom prst="rect">
@@ -31880,205 +32948,7 @@
                 <a:ea typeface="Trebuchet MS" pitchFamily="34" charset="-122"/>
                 <a:cs typeface="Trebuchet MS" pitchFamily="34" charset="-120"/>
               </a:rPr>
-              <a:t>d</a:t>
-            </a:r>
-            <a:endParaRPr lang="en-US" sz="900" dirty="0"/>
-          </a:p>
-        </p:txBody>
-      </p:sp>
-      <p:sp>
-        <p:nvSpPr>
-          <p:cNvPr id="40" name="Shape 38"/>
-          <p:cNvSpPr/>
-          <p:nvPr/>
-        </p:nvSpPr>
-        <p:spPr>
-          <a:xfrm>
-            <a:off x="4850892" y="4169664"/>
-            <a:ext cx="685800" cy="475488"/>
-          </a:xfrm>
-          <a:prstGeom prst="rect">
-            <a:avLst>
-              <a:gd name="adj" fmla="val 7692"/>
-            </a:avLst>
-          </a:prstGeom>
-          <a:solidFill>
-            <a:srgbClr val="FFFFFF"/>
-          </a:solidFill>
-          <a:ln w="12700">
-            <a:solidFill>
-              <a:srgbClr val="DB2777"/>
-            </a:solidFill>
-            <a:prstDash val="solid"/>
-          </a:ln>
-        </p:spPr>
-      </p:sp>
-      <p:sp>
-        <p:nvSpPr>
-          <p:cNvPr id="41" name="Text 39"/>
-          <p:cNvSpPr/>
-          <p:nvPr/>
-        </p:nvSpPr>
-        <p:spPr>
-          <a:xfrm>
-            <a:off x="4850892" y="4169664"/>
-            <a:ext cx="685800" cy="475488"/>
-          </a:xfrm>
-          <a:prstGeom prst="rect">
-            <a:avLst/>
-          </a:prstGeom>
-          <a:noFill/>
-          <a:ln/>
-        </p:spPr>
-        <p:txBody>
-          <a:bodyPr wrap="square" lIns="0" tIns="0" rIns="0" bIns="0" rtlCol="0" anchor="ctr"/>
-          <a:lstStyle/>
-          <a:p>
-            <a:pPr algn="ctr" indent="0" marL="0">
-              <a:buNone/>
-            </a:pPr>
-            <a:r>
-              <a:rPr lang="en-US" sz="900" b="1" dirty="0">
-                <a:solidFill>
-                  <a:srgbClr val="9D174D"/>
-                </a:solidFill>
-                <a:latin typeface="Trebuchet MS" pitchFamily="34" charset="0"/>
-                <a:ea typeface="Trebuchet MS" pitchFamily="34" charset="-122"/>
-                <a:cs typeface="Trebuchet MS" pitchFamily="34" charset="-120"/>
-              </a:rPr>
-              <a:t>er</a:t>
-            </a:r>
-            <a:endParaRPr lang="en-US" sz="900" dirty="0"/>
-          </a:p>
-        </p:txBody>
-      </p:sp>
-      <p:sp>
-        <p:nvSpPr>
-          <p:cNvPr id="42" name="Shape 40"/>
-          <p:cNvSpPr/>
-          <p:nvPr/>
-        </p:nvSpPr>
-        <p:spPr>
-          <a:xfrm>
-            <a:off x="6062472" y="4169664"/>
-            <a:ext cx="685800" cy="475488"/>
-          </a:xfrm>
-          <a:prstGeom prst="rect">
-            <a:avLst>
-              <a:gd name="adj" fmla="val 7692"/>
-            </a:avLst>
-          </a:prstGeom>
-          <a:solidFill>
-            <a:srgbClr val="FFFFFF"/>
-          </a:solidFill>
-          <a:ln w="12700">
-            <a:solidFill>
-              <a:srgbClr val="DB2777"/>
-            </a:solidFill>
-            <a:prstDash val="solid"/>
-          </a:ln>
-        </p:spPr>
-      </p:sp>
-      <p:sp>
-        <p:nvSpPr>
-          <p:cNvPr id="43" name="Text 41"/>
-          <p:cNvSpPr/>
-          <p:nvPr/>
-        </p:nvSpPr>
-        <p:spPr>
-          <a:xfrm>
-            <a:off x="6062472" y="4169664"/>
-            <a:ext cx="685800" cy="475488"/>
-          </a:xfrm>
-          <a:prstGeom prst="rect">
-            <a:avLst/>
-          </a:prstGeom>
-          <a:noFill/>
-          <a:ln/>
-        </p:spPr>
-        <p:txBody>
-          <a:bodyPr wrap="square" lIns="0" tIns="0" rIns="0" bIns="0" rtlCol="0" anchor="ctr"/>
-          <a:lstStyle/>
-          <a:p>
-            <a:pPr algn="ctr" indent="0" marL="0">
-              <a:buNone/>
-            </a:pPr>
-            <a:r>
-              <a:rPr lang="en-US" sz="900" b="1" dirty="0">
-                <a:solidFill>
-                  <a:srgbClr val="9D174D"/>
-                </a:solidFill>
-                <a:latin typeface="Trebuchet MS" pitchFamily="34" charset="0"/>
-                <a:ea typeface="Trebuchet MS" pitchFamily="34" charset="-122"/>
-                <a:cs typeface="Trebuchet MS" pitchFamily="34" charset="-120"/>
-              </a:rPr>
-              <a:t>l</a:t>
-            </a:r>
-            <a:endParaRPr lang="en-US" sz="900" dirty="0"/>
-          </a:p>
-        </p:txBody>
-      </p:sp>
-      <p:sp>
-        <p:nvSpPr>
-          <p:cNvPr id="44" name="Shape 42"/>
-          <p:cNvSpPr/>
-          <p:nvPr/>
-        </p:nvSpPr>
-        <p:spPr>
-          <a:xfrm>
-            <a:off x="7274052" y="4169664"/>
-            <a:ext cx="685800" cy="475488"/>
-          </a:xfrm>
-          <a:prstGeom prst="rect">
-            <a:avLst>
-              <a:gd name="adj" fmla="val 7692"/>
-            </a:avLst>
-          </a:prstGeom>
-          <a:solidFill>
-            <a:srgbClr val="FFFFFF"/>
-          </a:solidFill>
-          <a:ln w="12700">
-            <a:solidFill>
-              <a:srgbClr val="DB2777"/>
-            </a:solidFill>
-            <a:prstDash val="solid"/>
-          </a:ln>
-        </p:spPr>
-      </p:sp>
-      <p:sp>
-        <p:nvSpPr>
-          <p:cNvPr id="45" name="Text 43"/>
-          <p:cNvSpPr/>
-          <p:nvPr/>
-        </p:nvSpPr>
-        <p:spPr>
-          <a:xfrm>
-            <a:off x="7274052" y="4169664"/>
-            <a:ext cx="685800" cy="475488"/>
-          </a:xfrm>
-          <a:prstGeom prst="rect">
-            <a:avLst/>
-          </a:prstGeom>
-          <a:noFill/>
-          <a:ln/>
-        </p:spPr>
-        <p:txBody>
-          <a:bodyPr wrap="square" lIns="0" tIns="0" rIns="0" bIns="0" rtlCol="0" anchor="ctr"/>
-          <a:lstStyle/>
-          <a:p>
-            <a:pPr algn="ctr" indent="0" marL="0">
-              <a:buNone/>
-            </a:pPr>
-            <a:r>
-              <a:rPr lang="en-US" sz="900" b="1" dirty="0">
-                <a:solidFill>
-                  <a:srgbClr val="9D174D"/>
-                </a:solidFill>
-                <a:latin typeface="Trebuchet MS" pitchFamily="34" charset="0"/>
-                <a:ea typeface="Trebuchet MS" pitchFamily="34" charset="-122"/>
-                <a:cs typeface="Trebuchet MS" pitchFamily="34" charset="-120"/>
-              </a:rPr>
-              <a:t>y</a:t>
+              <a:t>s</a:t>
             </a:r>
             <a:endParaRPr lang="en-US" sz="900" dirty="0"/>
           </a:p>
@@ -32370,7 +33240,7 @@
                 <a:ea typeface="Calibri" pitchFamily="34" charset="-122"/>
                 <a:cs typeface="Calibri" pitchFamily="34" charset="-120"/>
               </a:rPr>
-              <a:t>Word Labs  •  wordlabs.app  •  Root: 'order' = arrange, sequence, command</a:t>
+              <a:t>Word Labs  •  wordlabs.app  •  Root: 'order' = arrangement, sequence, command</a:t>
             </a:r>
             <a:endParaRPr lang="en-US" sz="800" dirty="0"/>
           </a:p>
@@ -33539,7 +34409,7 @@
                 <a:ea typeface="Calibri" pitchFamily="34" charset="-122"/>
                 <a:cs typeface="Calibri" pitchFamily="34" charset="-120"/>
               </a:rPr>
-              <a:t>Word Labs  •  wordlabs.app  •  Root: 'order' = arrange, sequence, command</a:t>
+              <a:t>Word Labs  •  wordlabs.app  •  Root: 'order' = arrangement, sequence, command</a:t>
             </a:r>
             <a:endParaRPr lang="en-US" sz="800" dirty="0"/>
           </a:p>
@@ -34338,7 +35208,7 @@
                 <a:ea typeface="Trebuchet MS" pitchFamily="34" charset="-122"/>
                 <a:cs typeface="Trebuchet MS" pitchFamily="34" charset="-120"/>
               </a:rPr>
-              <a:t>sub-</a:t>
+              <a:t>mis-</a:t>
             </a:r>
             <a:endParaRPr lang="en-US" sz="1300" dirty="0"/>
           </a:p>
@@ -34491,7 +35361,7 @@
                 <a:ea typeface="Trebuchet MS" pitchFamily="34" charset="-122"/>
                 <a:cs typeface="Trebuchet MS" pitchFamily="34" charset="-120"/>
               </a:rPr>
-              <a:t>mis-</a:t>
+              <a:t>sub-</a:t>
             </a:r>
             <a:endParaRPr lang="en-US" sz="1300" dirty="0"/>
           </a:p>
@@ -35081,7 +35951,7 @@
                 <a:ea typeface="Trebuchet MS" pitchFamily="34" charset="-122"/>
                 <a:cs typeface="Trebuchet MS" pitchFamily="34" charset="-120"/>
               </a:rPr>
-              <a:t>suborder</a:t>
+              <a:t>orders</a:t>
             </a:r>
             <a:endParaRPr lang="en-US" sz="1200" dirty="0"/>
           </a:p>
@@ -35147,7 +36017,7 @@
                 <a:ea typeface="Trebuchet MS" pitchFamily="34" charset="-122"/>
                 <a:cs typeface="Trebuchet MS" pitchFamily="34" charset="-120"/>
               </a:rPr>
-              <a:t>reordering</a:t>
+              <a:t>disorderly</a:t>
             </a:r>
             <a:endParaRPr lang="en-US" sz="1200" dirty="0"/>
           </a:p>
@@ -35439,7 +36309,7 @@
                 <a:ea typeface="Calibri" pitchFamily="34" charset="-122"/>
                 <a:cs typeface="Calibri" pitchFamily="34" charset="-120"/>
               </a:rPr>
-              <a:t>Word Labs  •  wordlabs.app  •  Root: 'order' = arrange, sequence, command</a:t>
+              <a:t>Word Labs  •  wordlabs.app  •  Root: 'order' = arrangement, sequence, command</a:t>
             </a:r>
             <a:endParaRPr lang="en-US" sz="800" dirty="0"/>
           </a:p>
@@ -35603,7 +36473,7 @@
                 <a:ea typeface="Calibri" pitchFamily="34" charset="-122"/>
                 <a:cs typeface="Calibri" pitchFamily="34" charset="-120"/>
               </a:rPr>
-              <a:t>The core part of a word carrying its basic meaning. For example, 'order' means 'arrange, sequence, command'.</a:t>
+              <a:t>The core part of a word carrying its basic meaning. For example, 'order' means 'arrangement, sequence, command'.</a:t>
             </a:r>
             <a:endParaRPr lang="en-US" sz="1350" dirty="0"/>
           </a:p>
@@ -36223,7 +37093,7 @@
                 <a:ea typeface="Calibri" pitchFamily="34" charset="-122"/>
                 <a:cs typeface="Calibri" pitchFamily="34" charset="-120"/>
               </a:rPr>
-              <a:t>Word Labs  •  wordlabs.app  •  Root: 'order' = arrange, sequence, command</a:t>
+              <a:t>Word Labs  •  wordlabs.app  •  Root: 'order' = arrangement, sequence, command</a:t>
             </a:r>
             <a:endParaRPr lang="en-US" sz="800" dirty="0"/>
           </a:p>
@@ -36335,7 +37205,7 @@
                 <a:ea typeface="Calibri" pitchFamily="34" charset="-122"/>
                 <a:cs typeface="Calibri" pitchFamily="34" charset="-120"/>
               </a:rPr>
-              <a:t>1.  The word 'disorder' uses the prefix 'dis' to mean the opposite of order.</a:t>
+              <a:t>1.  The root 'order' comes from a Greek word.</a:t>
             </a:r>
             <a:endParaRPr lang="en-US" sz="1300" dirty="0"/>
           </a:p>
@@ -36358,11 +37228,11 @@
             </a:avLst>
           </a:prstGeom>
           <a:solidFill>
-            <a:srgbClr val="DCFCE7"/>
-          </a:solidFill>
-          <a:ln w="12700">
-            <a:solidFill>
-              <a:srgbClr val="16A34A"/>
+            <a:srgbClr val="FEE2E2"/>
+          </a:solidFill>
+          <a:ln w="12700">
+            <a:solidFill>
+              <a:srgbClr val="DC2626"/>
             </a:solidFill>
             <a:prstDash val="solid"/>
           </a:ln>
@@ -36395,13 +37265,13 @@
             <a:r>
               <a:rPr lang="en-US" sz="1100" b="1" dirty="0">
                 <a:solidFill>
-                  <a:srgbClr val="16A34A"/>
+                  <a:srgbClr val="DC2626"/>
                 </a:solidFill>
                 <a:latin typeface="Trebuchet MS" pitchFamily="34" charset="0"/>
                 <a:ea typeface="Trebuchet MS" pitchFamily="34" charset="-122"/>
                 <a:cs typeface="Trebuchet MS" pitchFamily="34" charset="-120"/>
               </a:rPr>
-              <a:t>TRUE</a:t>
+              <a:t>FALSE</a:t>
             </a:r>
             <a:endParaRPr lang="en-US" sz="1100" dirty="0"/>
           </a:p>
@@ -36474,7 +37344,7 @@
                 <a:ea typeface="Calibri" pitchFamily="34" charset="-122"/>
                 <a:cs typeface="Calibri" pitchFamily="34" charset="-120"/>
               </a:rPr>
-              <a:t>2.  The root 'order' comes from a Greek word.</a:t>
+              <a:t>2.  The word 'disorder' contains the root 'order'.</a:t>
             </a:r>
             <a:endParaRPr lang="en-US" sz="1300" dirty="0"/>
           </a:p>
@@ -36497,11 +37367,11 @@
             </a:avLst>
           </a:prstGeom>
           <a:solidFill>
-            <a:srgbClr val="FEE2E2"/>
-          </a:solidFill>
-          <a:ln w="12700">
-            <a:solidFill>
-              <a:srgbClr val="DC2626"/>
+            <a:srgbClr val="DCFCE7"/>
+          </a:solidFill>
+          <a:ln w="12700">
+            <a:solidFill>
+              <a:srgbClr val="16A34A"/>
             </a:solidFill>
             <a:prstDash val="solid"/>
           </a:ln>
@@ -36534,13 +37404,13 @@
             <a:r>
               <a:rPr lang="en-US" sz="1100" b="1" dirty="0">
                 <a:solidFill>
-                  <a:srgbClr val="DC2626"/>
+                  <a:srgbClr val="16A34A"/>
                 </a:solidFill>
                 <a:latin typeface="Trebuchet MS" pitchFamily="34" charset="0"/>
                 <a:ea typeface="Trebuchet MS" pitchFamily="34" charset="-122"/>
                 <a:cs typeface="Trebuchet MS" pitchFamily="34" charset="-120"/>
               </a:rPr>
-              <a:t>FALSE</a:t>
+              <a:t>TRUE</a:t>
             </a:r>
             <a:endParaRPr lang="en-US" sz="1100" dirty="0"/>
           </a:p>
@@ -36613,7 +37483,7 @@
                 <a:ea typeface="Calibri" pitchFamily="34" charset="-122"/>
                 <a:cs typeface="Calibri" pitchFamily="34" charset="-120"/>
               </a:rPr>
-              <a:t>3.  The word 'orderly' means organised and calm.</a:t>
+              <a:t>3.  'Preorder' means to order something after it has already been released.</a:t>
             </a:r>
             <a:endParaRPr lang="en-US" sz="1300" dirty="0"/>
           </a:p>
@@ -36636,11 +37506,11 @@
             </a:avLst>
           </a:prstGeom>
           <a:solidFill>
-            <a:srgbClr val="DCFCE7"/>
-          </a:solidFill>
-          <a:ln w="12700">
-            <a:solidFill>
-              <a:srgbClr val="16A34A"/>
+            <a:srgbClr val="FEE2E2"/>
+          </a:solidFill>
+          <a:ln w="12700">
+            <a:solidFill>
+              <a:srgbClr val="DC2626"/>
             </a:solidFill>
             <a:prstDash val="solid"/>
           </a:ln>
@@ -36673,13 +37543,13 @@
             <a:r>
               <a:rPr lang="en-US" sz="1100" b="1" dirty="0">
                 <a:solidFill>
-                  <a:srgbClr val="16A34A"/>
+                  <a:srgbClr val="DC2626"/>
                 </a:solidFill>
                 <a:latin typeface="Trebuchet MS" pitchFamily="34" charset="0"/>
                 <a:ea typeface="Trebuchet MS" pitchFamily="34" charset="-122"/>
                 <a:cs typeface="Trebuchet MS" pitchFamily="34" charset="-120"/>
               </a:rPr>
-              <a:t>TRUE</a:t>
+              <a:t>FALSE</a:t>
             </a:r>
             <a:endParaRPr lang="en-US" sz="1100" dirty="0"/>
           </a:p>
@@ -36752,7 +37622,7 @@
                 <a:ea typeface="Calibri" pitchFamily="34" charset="-122"/>
                 <a:cs typeface="Calibri" pitchFamily="34" charset="-120"/>
               </a:rPr>
-              <a:t>4.  Adding the prefix 're' to 'order' makes the word 'reorder', meaning to arrange again.</a:t>
+              <a:t>4.  The prefix 'dis' in 'disorder' means the opposite of order.</a:t>
             </a:r>
             <a:endParaRPr lang="en-US" sz="1300" dirty="0"/>
           </a:p>
@@ -36891,7 +37761,7 @@
                 <a:ea typeface="Calibri" pitchFamily="34" charset="-122"/>
                 <a:cs typeface="Calibri" pitchFamily="34" charset="-120"/>
               </a:rPr>
-              <a:t>5.  The word 'preorder' means to arrange something after it has already happened.</a:t>
+              <a:t>5.  The suffix '-ly' in 'orderly' turns the word into an adjective or adverb.</a:t>
             </a:r>
             <a:endParaRPr lang="en-US" sz="1300" dirty="0"/>
           </a:p>
@@ -36914,11 +37784,11 @@
             </a:avLst>
           </a:prstGeom>
           <a:solidFill>
-            <a:srgbClr val="FEE2E2"/>
-          </a:solidFill>
-          <a:ln w="12700">
-            <a:solidFill>
-              <a:srgbClr val="DC2626"/>
+            <a:srgbClr val="DCFCE7"/>
+          </a:solidFill>
+          <a:ln w="12700">
+            <a:solidFill>
+              <a:srgbClr val="16A34A"/>
             </a:solidFill>
             <a:prstDash val="solid"/>
           </a:ln>
@@ -36951,13 +37821,13 @@
             <a:r>
               <a:rPr lang="en-US" sz="1100" b="1" dirty="0">
                 <a:solidFill>
-                  <a:srgbClr val="DC2626"/>
+                  <a:srgbClr val="16A34A"/>
                 </a:solidFill>
                 <a:latin typeface="Trebuchet MS" pitchFamily="34" charset="0"/>
                 <a:ea typeface="Trebuchet MS" pitchFamily="34" charset="-122"/>
                 <a:cs typeface="Trebuchet MS" pitchFamily="34" charset="-120"/>
               </a:rPr>
-              <a:t>FALSE</a:t>
+              <a:t>TRUE</a:t>
             </a:r>
             <a:endParaRPr lang="en-US" sz="1100" dirty="0"/>
           </a:p>
@@ -37249,7 +38119,7 @@
                 <a:ea typeface="Calibri" pitchFamily="34" charset="-122"/>
                 <a:cs typeface="Calibri" pitchFamily="34" charset="-120"/>
               </a:rPr>
-              <a:t>Word Labs  •  wordlabs.app  •  Root: 'order' = arrange, sequence, command</a:t>
+              <a:t>Word Labs  •  wordlabs.app  •  Root: 'order' = arrangement, sequence, command</a:t>
             </a:r>
             <a:endParaRPr lang="en-US" sz="800" dirty="0"/>
           </a:p>
@@ -37386,7 +38256,7 @@
                 <a:ea typeface="Trebuchet MS" pitchFamily="34" charset="-122"/>
                 <a:cs typeface="Trebuchet MS" pitchFamily="34" charset="-120"/>
               </a:rPr>
-              <a:t>arrange, sequence, command</a:t>
+              <a:t>arrangement, sequence, command</a:t>
             </a:r>
             <a:endParaRPr lang="en-US" sz="2000" dirty="0"/>
           </a:p>
@@ -37926,7 +38796,7 @@
                 <a:ea typeface="Trebuchet MS" pitchFamily="34" charset="-122"/>
                 <a:cs typeface="Trebuchet MS" pitchFamily="34" charset="-120"/>
               </a:rPr>
-              <a:t>suborder</a:t>
+              <a:t>orders</a:t>
             </a:r>
             <a:endParaRPr lang="en-US" sz="1300" dirty="0"/>
           </a:p>
@@ -38218,7 +39088,7 @@
                 <a:ea typeface="Calibri" pitchFamily="34" charset="-122"/>
                 <a:cs typeface="Calibri" pitchFamily="34" charset="-120"/>
               </a:rPr>
-              <a:t>Word Labs  •  wordlabs.app  •  Root: 'order' = arrange, sequence, command</a:t>
+              <a:t>Word Labs  •  wordlabs.app  •  Root: 'order' = arrangement, sequence, command</a:t>
             </a:r>
             <a:endParaRPr lang="en-US" sz="800" dirty="0"/>
           </a:p>
@@ -39017,7 +39887,7 @@
                 <a:ea typeface="Trebuchet MS" pitchFamily="34" charset="-122"/>
                 <a:cs typeface="Trebuchet MS" pitchFamily="34" charset="-120"/>
               </a:rPr>
-              <a:t>sub-</a:t>
+              <a:t>mis-</a:t>
             </a:r>
             <a:endParaRPr lang="en-US" sz="1300" dirty="0"/>
           </a:p>
@@ -39170,7 +40040,7 @@
                 <a:ea typeface="Trebuchet MS" pitchFamily="34" charset="-122"/>
                 <a:cs typeface="Trebuchet MS" pitchFamily="34" charset="-120"/>
               </a:rPr>
-              <a:t>mis-</a:t>
+              <a:t>sub-</a:t>
             </a:r>
             <a:endParaRPr lang="en-US" sz="1300" dirty="0"/>
           </a:p>
@@ -39992,7 +40862,7 @@
                 <a:ea typeface="Calibri" pitchFamily="34" charset="-122"/>
                 <a:cs typeface="Calibri" pitchFamily="34" charset="-120"/>
               </a:rPr>
-              <a:t>Word Labs  •  wordlabs.app  •  Root: 'order' = arrange, sequence, command</a:t>
+              <a:t>Word Labs  •  wordlabs.app  •  Root: 'order' = arrangement, sequence, command</a:t>
             </a:r>
             <a:endParaRPr lang="en-US" sz="800" dirty="0"/>
           </a:p>
@@ -40170,7 +41040,7 @@
                 <a:ea typeface="Calibri" pitchFamily="34" charset="-122"/>
                 <a:cs typeface="Calibri" pitchFamily="34" charset="-120"/>
               </a:rPr>
-              <a:t>A smaller group within a larger category used in science to sort living things.</a:t>
+              <a:t>More than one instruction or command given to someone.</a:t>
             </a:r>
             <a:endParaRPr lang="en-US" sz="1200" dirty="0"/>
           </a:p>
@@ -40309,7 +41179,7 @@
                 <a:ea typeface="Calibri" pitchFamily="34" charset="-122"/>
                 <a:cs typeface="Calibri" pitchFamily="34" charset="-120"/>
               </a:rPr>
-              <a:t>The act of arranging things or telling someone what to do.</a:t>
+              <a:t>The act of arranging things or asking for something to be delivered.</a:t>
             </a:r>
             <a:endParaRPr lang="en-US" sz="1200" dirty="0"/>
           </a:p>
@@ -40448,7 +41318,7 @@
                 <a:ea typeface="Calibri" pitchFamily="34" charset="-122"/>
                 <a:cs typeface="Calibri" pitchFamily="34" charset="-120"/>
               </a:rPr>
-              <a:t>To request or buy something before it is available in shops.</a:t>
+              <a:t>To arrange to receive something before it is officially available.</a:t>
             </a:r>
             <a:endParaRPr lang="en-US" sz="1200" dirty="0"/>
           </a:p>
@@ -40587,7 +41457,7 @@
                 <a:ea typeface="Calibri" pitchFamily="34" charset="-122"/>
                 <a:cs typeface="Calibri" pitchFamily="34" charset="-120"/>
               </a:rPr>
-              <a:t>A state of confusion or mess where things are not in their proper place.</a:t>
+              <a:t>A state where things are messy or not organised properly.</a:t>
             </a:r>
             <a:endParaRPr lang="en-US" sz="1200" dirty="0"/>
           </a:p>
@@ -40726,7 +41596,7 @@
                 <a:ea typeface="Calibri" pitchFamily="34" charset="-122"/>
                 <a:cs typeface="Calibri" pitchFamily="34" charset="-120"/>
               </a:rPr>
-              <a:t>Organised and calm, with everything in the right place.</a:t>
+              <a:t>Done in a calm, neat, and organised way.</a:t>
             </a:r>
             <a:endParaRPr lang="en-US" sz="1200" dirty="0"/>
           </a:p>
@@ -40865,7 +41735,7 @@
                 <a:ea typeface="Calibri" pitchFamily="34" charset="-122"/>
                 <a:cs typeface="Calibri" pitchFamily="34" charset="-120"/>
               </a:rPr>
-              <a:t>Arranged neatly or given an instruction to do something.</a:t>
+              <a:t>Arranged neatly, or having asked for something to be brought or delivered.</a:t>
             </a:r>
             <a:endParaRPr lang="en-US" sz="1200" dirty="0"/>
           </a:p>
@@ -40938,7 +41808,7 @@
                 <a:ea typeface="Trebuchet MS" pitchFamily="34" charset="-122"/>
                 <a:cs typeface="Trebuchet MS" pitchFamily="34" charset="-120"/>
               </a:rPr>
-              <a:t>suborder</a:t>
+              <a:t>orders</a:t>
             </a:r>
             <a:endParaRPr lang="en-US" sz="1200" dirty="0"/>
           </a:p>
@@ -41004,7 +41874,7 @@
                 <a:ea typeface="Calibri" pitchFamily="34" charset="-122"/>
                 <a:cs typeface="Calibri" pitchFamily="34" charset="-120"/>
               </a:rPr>
-              <a:t>To arrange things again or to ask for more supplies a second time.</a:t>
+              <a:t>To arrange things again or place a new request for more of something.</a:t>
             </a:r>
             <a:endParaRPr lang="en-US" sz="1200" dirty="0"/>
           </a:p>
@@ -41296,7 +42166,7 @@
                 <a:ea typeface="Calibri" pitchFamily="34" charset="-122"/>
                 <a:cs typeface="Calibri" pitchFamily="34" charset="-120"/>
               </a:rPr>
-              <a:t>Word Labs  •  wordlabs.app  •  Root: 'order' = arrange, sequence, command</a:t>
+              <a:t>Word Labs  •  wordlabs.app  •  Root: 'order' = arrangement, sequence, command</a:t>
             </a:r>
             <a:endParaRPr lang="en-US" sz="800" dirty="0"/>
           </a:p>
@@ -41499,7 +42369,7 @@
                 <a:ea typeface="Calibri" pitchFamily="34" charset="-122"/>
                 <a:cs typeface="Calibri" pitchFamily="34" charset="-120"/>
               </a:rPr>
-              <a:t>The teacher asked the students to reorder the sentences so the story made sense.</a:t>
+              <a:t>The teacher asked the students to stand in an orderly line before entering the classroom.</a:t>
             </a:r>
             <a:endParaRPr lang="en-US" sz="1500" dirty="0"/>
           </a:p>
@@ -41663,7 +42533,7 @@
                 <a:ea typeface="Calibri" pitchFamily="34" charset="-122"/>
                 <a:cs typeface="Calibri" pitchFamily="34" charset="-120"/>
               </a:rPr>
-              <a:t>The classroom was in complete disorder after the art supplies were knocked off the shelf.</a:t>
+              <a:t>Mia decided to preorder the new book so she would receive it on the day it came out.</a:t>
             </a:r>
             <a:endParaRPr lang="en-US" sz="1500" dirty="0"/>
           </a:p>
@@ -41827,7 +42697,7 @@
                 <a:ea typeface="Calibri" pitchFamily="34" charset="-122"/>
                 <a:cs typeface="Calibri" pitchFamily="34" charset="-120"/>
               </a:rPr>
-              <a:t>We need to preorder our tickets before they sell out this weekend.</a:t>
+              <a:t>The hurricane left the town in complete disorder, with debris scattered everywhere.</a:t>
             </a:r>
             <a:endParaRPr lang="en-US" sz="1500" dirty="0"/>
           </a:p>
